--- a/1_Sessions/B2_Ham_va_KPI/Slide_B2.pptx
+++ b/1_Sessions/B2_Ham_va_KPI/Slide_B2.pptx
@@ -160,7 +160,7 @@
   <pc:docChgLst>
     <pc:chgData name="Nhan Pham Le" userId="6366da15f1f739f9" providerId="LiveId" clId="{B7E72FC1-F79A-4602-B51C-6ED1DC3BF548}"/>
     <pc:docChg chg="undo custSel modSld">
-      <pc:chgData name="Nhan Pham Le" userId="6366da15f1f739f9" providerId="LiveId" clId="{B7E72FC1-F79A-4602-B51C-6ED1DC3BF548}" dt="2026-09-27T12:45:57.791" v="170" actId="1076"/>
+      <pc:chgData name="Nhan Pham Le" userId="6366da15f1f739f9" providerId="LiveId" clId="{B7E72FC1-F79A-4602-B51C-6ED1DC3BF548}" dt="2026-09-30T14:22:21.541" v="174" actId="113"/>
       <pc:docMkLst>
         <pc:docMk/>
       </pc:docMkLst>
@@ -176,6 +176,36 @@
             <pc:docMk/>
             <pc:sldMk cId="2243051540" sldId="302"/>
             <ac:spMk id="15" creationId="{00000000-0000-0000-0000-000000000000}"/>
+          </ac:spMkLst>
+        </pc:spChg>
+      </pc:sldChg>
+      <pc:sldChg chg="modSp mod">
+        <pc:chgData name="Nhan Pham Le" userId="6366da15f1f739f9" providerId="LiveId" clId="{B7E72FC1-F79A-4602-B51C-6ED1DC3BF548}" dt="2026-09-30T14:01:55.116" v="172" actId="14734"/>
+        <pc:sldMkLst>
+          <pc:docMk/>
+          <pc:sldMk cId="0" sldId="329"/>
+        </pc:sldMkLst>
+        <pc:graphicFrameChg chg="modGraphic">
+          <ac:chgData name="Nhan Pham Le" userId="6366da15f1f739f9" providerId="LiveId" clId="{B7E72FC1-F79A-4602-B51C-6ED1DC3BF548}" dt="2026-09-30T14:01:55.116" v="172" actId="14734"/>
+          <ac:graphicFrameMkLst>
+            <pc:docMk/>
+            <pc:sldMk cId="0" sldId="329"/>
+            <ac:graphicFrameMk id="4" creationId="{00000000-0000-0000-0000-000000000000}"/>
+          </ac:graphicFrameMkLst>
+        </pc:graphicFrameChg>
+      </pc:sldChg>
+      <pc:sldChg chg="modSp mod">
+        <pc:chgData name="Nhan Pham Le" userId="6366da15f1f739f9" providerId="LiveId" clId="{B7E72FC1-F79A-4602-B51C-6ED1DC3BF548}" dt="2026-09-30T14:22:21.541" v="174" actId="113"/>
+        <pc:sldMkLst>
+          <pc:docMk/>
+          <pc:sldMk cId="0" sldId="330"/>
+        </pc:sldMkLst>
+        <pc:spChg chg="mod">
+          <ac:chgData name="Nhan Pham Le" userId="6366da15f1f739f9" providerId="LiveId" clId="{B7E72FC1-F79A-4602-B51C-6ED1DC3BF548}" dt="2026-09-30T14:22:21.541" v="174" actId="113"/>
+          <ac:spMkLst>
+            <pc:docMk/>
+            <pc:sldMk cId="0" sldId="330"/>
+            <ac:spMk id="5" creationId="{00000000-0000-0000-0000-000000000000}"/>
           </ac:spMkLst>
         </pc:spChg>
       </pc:sldChg>
@@ -266,7 +296,7 @@
           <a:p>
             <a:fld id="{0CEE4C46-C12C-FA42-B2D3-1CBB24092E48}" type="datetimeFigureOut">
               <a:rPr lang="en-US" smtClean="0"/>
-              <a:t>9/29/26</a:t>
+              <a:t>30/9/2026</a:t>
             </a:fld>
             <a:endParaRPr lang="en-US"/>
           </a:p>
@@ -5778,67 +5808,1232 @@
           <a:lstStyle/>
           <a:p>
             <a:r>
-              <a:t>Thời lượng: 15 phút.</a:t>
-            </a:r>
-          </a:p>
-          <a:p>
-            <a:r>
-              <a:t>LỜI GIẢNG (giao bài)</a:t>
-            </a:r>
-          </a:p>
-          <a:p>
-            <a:r>
-              <a:t>Giờ đến lượt các bạn, 15 phút. Mở file khởi đầu (→ ../B1_Nen_tang_Excel_Du_lieu/Practice/B1_MCI_Mart_Q1_2025_Answer.xlsx) và file sản phẩm (→ Practice/B2_Product_DuplicateKey.xlsx). Việc đầu tiên là chép sheet Product sang file của bạn: chuột phải vào tab, Move or Copy, chọn file của bạn, nhớ tick "Create a copy".</a:t>
-            </a:r>
-          </a:p>
-          <a:p>
-            <a:r>
-              <a:t>Bước 2 là bước D2: trước khi tra, kiểm tra khóa. Thêm một cột COUNTIF tạm vào bảng Product, lọc những dòng lớn hơn 1. Các bạn đã biết trước là P021; xóa dòng bản ghi cũ đi rồi xóa cột kiểm tra.</a:t>
-            </a:r>
-          </a:p>
-          <a:p>
-            <a:r>
-              <a:t>Bước 3 và 4: thêm các cột vào tblSales bằng công thức theo tên cột. Gõ ở một ô, Table tự điền cả cột.</a:t>
-            </a:r>
-          </a:p>
-          <a:p>
-            <a:r>
-              <a:t>Tự kiểm tra: chọn cột COGS, Status Bar phải ra 619.663.000. Nếu bạn ra 617.871.000, thiếu đúng 1.792.000, thì bạn chưa xóa bản ghi P021 cũ.</a:t>
-            </a:r>
-          </a:p>
-          <a:p>
-            <a:r>
+              <a:rPr dirty="0" err="1"/>
+              <a:t>Thời</a:t>
+            </a:r>
+            <a:r>
+              <a:rPr dirty="0"/>
+              <a:t> </a:t>
+            </a:r>
+            <a:r>
+              <a:rPr dirty="0" err="1"/>
+              <a:t>lượng</a:t>
+            </a:r>
+            <a:r>
+              <a:rPr dirty="0"/>
+              <a:t>: 15 </a:t>
+            </a:r>
+            <a:r>
+              <a:rPr dirty="0" err="1"/>
+              <a:t>phút</a:t>
+            </a:r>
+            <a:r>
+              <a:rPr dirty="0"/>
+              <a:t>.</a:t>
+            </a:r>
+          </a:p>
+          <a:p>
+            <a:r>
+              <a:rPr dirty="0"/>
+              <a:t>LỜI GIẢNG (</a:t>
+            </a:r>
+            <a:r>
+              <a:rPr dirty="0" err="1"/>
+              <a:t>giao</a:t>
+            </a:r>
+            <a:r>
+              <a:rPr dirty="0"/>
+              <a:t> </a:t>
+            </a:r>
+            <a:r>
+              <a:rPr dirty="0" err="1"/>
+              <a:t>bài</a:t>
+            </a:r>
+            <a:r>
+              <a:rPr dirty="0"/>
+              <a:t>)</a:t>
+            </a:r>
+          </a:p>
+          <a:p>
+            <a:r>
+              <a:rPr dirty="0" err="1"/>
+              <a:t>Giờ</a:t>
+            </a:r>
+            <a:r>
+              <a:rPr dirty="0"/>
+              <a:t> </a:t>
+            </a:r>
+            <a:r>
+              <a:rPr dirty="0" err="1"/>
+              <a:t>đến</a:t>
+            </a:r>
+            <a:r>
+              <a:rPr dirty="0"/>
+              <a:t> </a:t>
+            </a:r>
+            <a:r>
+              <a:rPr dirty="0" err="1"/>
+              <a:t>lượt</a:t>
+            </a:r>
+            <a:r>
+              <a:rPr dirty="0"/>
+              <a:t> </a:t>
+            </a:r>
+            <a:r>
+              <a:rPr dirty="0" err="1"/>
+              <a:t>các</a:t>
+            </a:r>
+            <a:r>
+              <a:rPr dirty="0"/>
+              <a:t> </a:t>
+            </a:r>
+            <a:r>
+              <a:rPr dirty="0" err="1"/>
+              <a:t>bạn</a:t>
+            </a:r>
+            <a:r>
+              <a:rPr dirty="0"/>
+              <a:t>, 15 </a:t>
+            </a:r>
+            <a:r>
+              <a:rPr dirty="0" err="1"/>
+              <a:t>phút</a:t>
+            </a:r>
+            <a:r>
+              <a:rPr dirty="0"/>
+              <a:t>. </a:t>
+            </a:r>
+            <a:r>
+              <a:rPr dirty="0" err="1"/>
+              <a:t>Mở</a:t>
+            </a:r>
+            <a:r>
+              <a:rPr dirty="0"/>
+              <a:t> file </a:t>
+            </a:r>
+            <a:r>
+              <a:rPr dirty="0" err="1"/>
+              <a:t>khởi</a:t>
+            </a:r>
+            <a:r>
+              <a:rPr dirty="0"/>
+              <a:t> </a:t>
+            </a:r>
+            <a:r>
+              <a:rPr dirty="0" err="1"/>
+              <a:t>đầu</a:t>
+            </a:r>
+            <a:r>
+              <a:rPr dirty="0"/>
+              <a:t> (→ ../B1_Nen_tang_Excel_Du_lieu/Practice/B1_MCI_Mart_Q1_2025_Answer.xlsx) </a:t>
+            </a:r>
+            <a:r>
+              <a:rPr dirty="0" err="1"/>
+              <a:t>và</a:t>
+            </a:r>
+            <a:r>
+              <a:rPr dirty="0"/>
+              <a:t> file </a:t>
+            </a:r>
+            <a:r>
+              <a:rPr dirty="0" err="1"/>
+              <a:t>sản</a:t>
+            </a:r>
+            <a:r>
+              <a:rPr dirty="0"/>
+              <a:t> </a:t>
+            </a:r>
+            <a:r>
+              <a:rPr dirty="0" err="1"/>
+              <a:t>phẩm</a:t>
+            </a:r>
+            <a:r>
+              <a:rPr dirty="0"/>
+              <a:t> (→ Practice/B2_Product_DuplicateKey.xlsx). </a:t>
+            </a:r>
+            <a:r>
+              <a:rPr dirty="0" err="1"/>
+              <a:t>Việc</a:t>
+            </a:r>
+            <a:r>
+              <a:rPr dirty="0"/>
+              <a:t> </a:t>
+            </a:r>
+            <a:r>
+              <a:rPr dirty="0" err="1"/>
+              <a:t>đầu</a:t>
+            </a:r>
+            <a:r>
+              <a:rPr dirty="0"/>
+              <a:t> </a:t>
+            </a:r>
+            <a:r>
+              <a:rPr dirty="0" err="1"/>
+              <a:t>tiên</a:t>
+            </a:r>
+            <a:r>
+              <a:rPr dirty="0"/>
+              <a:t> </a:t>
+            </a:r>
+            <a:r>
+              <a:rPr dirty="0" err="1"/>
+              <a:t>là</a:t>
+            </a:r>
+            <a:r>
+              <a:rPr dirty="0"/>
+              <a:t> </a:t>
+            </a:r>
+            <a:r>
+              <a:rPr dirty="0" err="1"/>
+              <a:t>chép</a:t>
+            </a:r>
+            <a:r>
+              <a:rPr dirty="0"/>
+              <a:t> sheet Product sang file </a:t>
+            </a:r>
+            <a:r>
+              <a:rPr dirty="0" err="1"/>
+              <a:t>của</a:t>
+            </a:r>
+            <a:r>
+              <a:rPr dirty="0"/>
+              <a:t> </a:t>
+            </a:r>
+            <a:r>
+              <a:rPr dirty="0" err="1"/>
+              <a:t>bạn</a:t>
+            </a:r>
+            <a:r>
+              <a:rPr dirty="0"/>
+              <a:t>: </a:t>
+            </a:r>
+            <a:r>
+              <a:rPr dirty="0" err="1"/>
+              <a:t>chuột</a:t>
+            </a:r>
+            <a:r>
+              <a:rPr dirty="0"/>
+              <a:t> </a:t>
+            </a:r>
+            <a:r>
+              <a:rPr dirty="0" err="1"/>
+              <a:t>phải</a:t>
+            </a:r>
+            <a:r>
+              <a:rPr dirty="0"/>
+              <a:t> </a:t>
+            </a:r>
+            <a:r>
+              <a:rPr dirty="0" err="1"/>
+              <a:t>vào</a:t>
+            </a:r>
+            <a:r>
+              <a:rPr dirty="0"/>
+              <a:t> tab, Move or Copy, </a:t>
+            </a:r>
+            <a:r>
+              <a:rPr dirty="0" err="1"/>
+              <a:t>chọn</a:t>
+            </a:r>
+            <a:r>
+              <a:rPr dirty="0"/>
+              <a:t> file </a:t>
+            </a:r>
+            <a:r>
+              <a:rPr dirty="0" err="1"/>
+              <a:t>của</a:t>
+            </a:r>
+            <a:r>
+              <a:rPr dirty="0"/>
+              <a:t> </a:t>
+            </a:r>
+            <a:r>
+              <a:rPr dirty="0" err="1"/>
+              <a:t>bạn</a:t>
+            </a:r>
+            <a:r>
+              <a:rPr dirty="0"/>
+              <a:t>, </a:t>
+            </a:r>
+            <a:r>
+              <a:rPr dirty="0" err="1"/>
+              <a:t>nhớ</a:t>
+            </a:r>
+            <a:r>
+              <a:rPr dirty="0"/>
+              <a:t> tick "Create a copy".</a:t>
+            </a:r>
+          </a:p>
+          <a:p>
+            <a:r>
+              <a:rPr dirty="0" err="1"/>
+              <a:t>Bước</a:t>
+            </a:r>
+            <a:r>
+              <a:rPr dirty="0"/>
+              <a:t> 2 </a:t>
+            </a:r>
+            <a:r>
+              <a:rPr dirty="0" err="1"/>
+              <a:t>là</a:t>
+            </a:r>
+            <a:r>
+              <a:rPr dirty="0"/>
+              <a:t> </a:t>
+            </a:r>
+            <a:r>
+              <a:rPr dirty="0" err="1"/>
+              <a:t>bước</a:t>
+            </a:r>
+            <a:r>
+              <a:rPr dirty="0"/>
+              <a:t> D2: </a:t>
+            </a:r>
+            <a:r>
+              <a:rPr dirty="0" err="1"/>
+              <a:t>trước</a:t>
+            </a:r>
+            <a:r>
+              <a:rPr dirty="0"/>
+              <a:t> </a:t>
+            </a:r>
+            <a:r>
+              <a:rPr dirty="0" err="1"/>
+              <a:t>khi</a:t>
+            </a:r>
+            <a:r>
+              <a:rPr dirty="0"/>
+              <a:t> </a:t>
+            </a:r>
+            <a:r>
+              <a:rPr dirty="0" err="1"/>
+              <a:t>tra</a:t>
+            </a:r>
+            <a:r>
+              <a:rPr dirty="0"/>
+              <a:t>, </a:t>
+            </a:r>
+            <a:r>
+              <a:rPr dirty="0" err="1"/>
+              <a:t>kiểm</a:t>
+            </a:r>
+            <a:r>
+              <a:rPr dirty="0"/>
+              <a:t> </a:t>
+            </a:r>
+            <a:r>
+              <a:rPr dirty="0" err="1"/>
+              <a:t>tra</a:t>
+            </a:r>
+            <a:r>
+              <a:rPr dirty="0"/>
+              <a:t> </a:t>
+            </a:r>
+            <a:r>
+              <a:rPr dirty="0" err="1"/>
+              <a:t>khóa</a:t>
+            </a:r>
+            <a:r>
+              <a:rPr dirty="0"/>
+              <a:t>. </a:t>
+            </a:r>
+            <a:r>
+              <a:rPr dirty="0" err="1"/>
+              <a:t>Thêm</a:t>
+            </a:r>
+            <a:r>
+              <a:rPr dirty="0"/>
+              <a:t> </a:t>
+            </a:r>
+            <a:r>
+              <a:rPr dirty="0" err="1"/>
+              <a:t>một</a:t>
+            </a:r>
+            <a:r>
+              <a:rPr dirty="0"/>
+              <a:t> </a:t>
+            </a:r>
+            <a:r>
+              <a:rPr dirty="0" err="1"/>
+              <a:t>cột</a:t>
+            </a:r>
+            <a:r>
+              <a:rPr dirty="0"/>
+              <a:t> COUNTIF </a:t>
+            </a:r>
+            <a:r>
+              <a:rPr dirty="0" err="1"/>
+              <a:t>tạm</a:t>
+            </a:r>
+            <a:r>
+              <a:rPr dirty="0"/>
+              <a:t> </a:t>
+            </a:r>
+            <a:r>
+              <a:rPr dirty="0" err="1"/>
+              <a:t>vào</a:t>
+            </a:r>
+            <a:r>
+              <a:rPr dirty="0"/>
+              <a:t> </a:t>
+            </a:r>
+            <a:r>
+              <a:rPr dirty="0" err="1"/>
+              <a:t>bảng</a:t>
+            </a:r>
+            <a:r>
+              <a:rPr dirty="0"/>
+              <a:t> Product, </a:t>
+            </a:r>
+            <a:r>
+              <a:rPr dirty="0" err="1"/>
+              <a:t>lọc</a:t>
+            </a:r>
+            <a:r>
+              <a:rPr dirty="0"/>
+              <a:t> </a:t>
+            </a:r>
+            <a:r>
+              <a:rPr dirty="0" err="1"/>
+              <a:t>những</a:t>
+            </a:r>
+            <a:r>
+              <a:rPr dirty="0"/>
+              <a:t> </a:t>
+            </a:r>
+            <a:r>
+              <a:rPr dirty="0" err="1"/>
+              <a:t>dòng</a:t>
+            </a:r>
+            <a:r>
+              <a:rPr dirty="0"/>
+              <a:t> </a:t>
+            </a:r>
+            <a:r>
+              <a:rPr dirty="0" err="1"/>
+              <a:t>lớn</a:t>
+            </a:r>
+            <a:r>
+              <a:rPr dirty="0"/>
+              <a:t> </a:t>
+            </a:r>
+            <a:r>
+              <a:rPr dirty="0" err="1"/>
+              <a:t>hơn</a:t>
+            </a:r>
+            <a:r>
+              <a:rPr dirty="0"/>
+              <a:t> 1. Các </a:t>
+            </a:r>
+            <a:r>
+              <a:rPr dirty="0" err="1"/>
+              <a:t>bạn</a:t>
+            </a:r>
+            <a:r>
+              <a:rPr dirty="0"/>
+              <a:t> </a:t>
+            </a:r>
+            <a:r>
+              <a:rPr dirty="0" err="1"/>
+              <a:t>đã</a:t>
+            </a:r>
+            <a:r>
+              <a:rPr dirty="0"/>
+              <a:t> </a:t>
+            </a:r>
+            <a:r>
+              <a:rPr dirty="0" err="1"/>
+              <a:t>biết</a:t>
+            </a:r>
+            <a:r>
+              <a:rPr dirty="0"/>
+              <a:t> </a:t>
+            </a:r>
+            <a:r>
+              <a:rPr dirty="0" err="1"/>
+              <a:t>trước</a:t>
+            </a:r>
+            <a:r>
+              <a:rPr dirty="0"/>
+              <a:t> </a:t>
+            </a:r>
+            <a:r>
+              <a:rPr dirty="0" err="1"/>
+              <a:t>là</a:t>
+            </a:r>
+            <a:r>
+              <a:rPr dirty="0"/>
+              <a:t> P021; </a:t>
+            </a:r>
+            <a:r>
+              <a:rPr dirty="0" err="1"/>
+              <a:t>xóa</a:t>
+            </a:r>
+            <a:r>
+              <a:rPr dirty="0"/>
+              <a:t> </a:t>
+            </a:r>
+            <a:r>
+              <a:rPr dirty="0" err="1"/>
+              <a:t>dòng</a:t>
+            </a:r>
+            <a:r>
+              <a:rPr dirty="0"/>
+              <a:t> </a:t>
+            </a:r>
+            <a:r>
+              <a:rPr dirty="0" err="1"/>
+              <a:t>bản</a:t>
+            </a:r>
+            <a:r>
+              <a:rPr dirty="0"/>
+              <a:t> </a:t>
+            </a:r>
+            <a:r>
+              <a:rPr dirty="0" err="1"/>
+              <a:t>ghi</a:t>
+            </a:r>
+            <a:r>
+              <a:rPr dirty="0"/>
+              <a:t> </a:t>
+            </a:r>
+            <a:r>
+              <a:rPr dirty="0" err="1"/>
+              <a:t>cũ</a:t>
+            </a:r>
+            <a:r>
+              <a:rPr dirty="0"/>
+              <a:t> </a:t>
+            </a:r>
+            <a:r>
+              <a:rPr dirty="0" err="1"/>
+              <a:t>đi</a:t>
+            </a:r>
+            <a:r>
+              <a:rPr dirty="0"/>
+              <a:t> </a:t>
+            </a:r>
+            <a:r>
+              <a:rPr dirty="0" err="1"/>
+              <a:t>rồi</a:t>
+            </a:r>
+            <a:r>
+              <a:rPr dirty="0"/>
+              <a:t> </a:t>
+            </a:r>
+            <a:r>
+              <a:rPr dirty="0" err="1"/>
+              <a:t>xóa</a:t>
+            </a:r>
+            <a:r>
+              <a:rPr dirty="0"/>
+              <a:t> </a:t>
+            </a:r>
+            <a:r>
+              <a:rPr dirty="0" err="1"/>
+              <a:t>cột</a:t>
+            </a:r>
+            <a:r>
+              <a:rPr dirty="0"/>
+              <a:t> </a:t>
+            </a:r>
+            <a:r>
+              <a:rPr dirty="0" err="1"/>
+              <a:t>kiểm</a:t>
+            </a:r>
+            <a:r>
+              <a:rPr dirty="0"/>
+              <a:t> </a:t>
+            </a:r>
+            <a:r>
+              <a:rPr dirty="0" err="1"/>
+              <a:t>tra</a:t>
+            </a:r>
+            <a:r>
+              <a:rPr dirty="0"/>
+              <a:t>.</a:t>
+            </a:r>
+          </a:p>
+          <a:p>
+            <a:r>
+              <a:rPr dirty="0" err="1"/>
+              <a:t>Bước</a:t>
+            </a:r>
+            <a:r>
+              <a:rPr dirty="0"/>
+              <a:t> 3 </a:t>
+            </a:r>
+            <a:r>
+              <a:rPr dirty="0" err="1"/>
+              <a:t>và</a:t>
+            </a:r>
+            <a:r>
+              <a:rPr dirty="0"/>
+              <a:t> 4: </a:t>
+            </a:r>
+            <a:r>
+              <a:rPr dirty="0" err="1"/>
+              <a:t>thêm</a:t>
+            </a:r>
+            <a:r>
+              <a:rPr dirty="0"/>
+              <a:t> </a:t>
+            </a:r>
+            <a:r>
+              <a:rPr dirty="0" err="1"/>
+              <a:t>các</a:t>
+            </a:r>
+            <a:r>
+              <a:rPr dirty="0"/>
+              <a:t> </a:t>
+            </a:r>
+            <a:r>
+              <a:rPr dirty="0" err="1"/>
+              <a:t>cột</a:t>
+            </a:r>
+            <a:r>
+              <a:rPr dirty="0"/>
+              <a:t> </a:t>
+            </a:r>
+            <a:r>
+              <a:rPr dirty="0" err="1"/>
+              <a:t>vào</a:t>
+            </a:r>
+            <a:r>
+              <a:rPr dirty="0"/>
+              <a:t> </a:t>
+            </a:r>
+            <a:r>
+              <a:rPr dirty="0" err="1"/>
+              <a:t>tblSales</a:t>
+            </a:r>
+            <a:r>
+              <a:rPr dirty="0"/>
+              <a:t> </a:t>
+            </a:r>
+            <a:r>
+              <a:rPr dirty="0" err="1"/>
+              <a:t>bằng</a:t>
+            </a:r>
+            <a:r>
+              <a:rPr dirty="0"/>
+              <a:t> </a:t>
+            </a:r>
+            <a:r>
+              <a:rPr dirty="0" err="1"/>
+              <a:t>công</a:t>
+            </a:r>
+            <a:r>
+              <a:rPr dirty="0"/>
+              <a:t> </a:t>
+            </a:r>
+            <a:r>
+              <a:rPr dirty="0" err="1"/>
+              <a:t>thức</a:t>
+            </a:r>
+            <a:r>
+              <a:rPr dirty="0"/>
+              <a:t> </a:t>
+            </a:r>
+            <a:r>
+              <a:rPr dirty="0" err="1"/>
+              <a:t>theo</a:t>
+            </a:r>
+            <a:r>
+              <a:rPr dirty="0"/>
+              <a:t> </a:t>
+            </a:r>
+            <a:r>
+              <a:rPr dirty="0" err="1"/>
+              <a:t>tên</a:t>
+            </a:r>
+            <a:r>
+              <a:rPr dirty="0"/>
+              <a:t> </a:t>
+            </a:r>
+            <a:r>
+              <a:rPr dirty="0" err="1"/>
+              <a:t>cột</a:t>
+            </a:r>
+            <a:r>
+              <a:rPr dirty="0"/>
+              <a:t>. </a:t>
+            </a:r>
+            <a:r>
+              <a:rPr dirty="0" err="1"/>
+              <a:t>Gõ</a:t>
+            </a:r>
+            <a:r>
+              <a:rPr dirty="0"/>
+              <a:t> ở </a:t>
+            </a:r>
+            <a:r>
+              <a:rPr dirty="0" err="1"/>
+              <a:t>một</a:t>
+            </a:r>
+            <a:r>
+              <a:rPr dirty="0"/>
+              <a:t> ô, Table </a:t>
+            </a:r>
+            <a:r>
+              <a:rPr dirty="0" err="1"/>
+              <a:t>tự</a:t>
+            </a:r>
+            <a:r>
+              <a:rPr dirty="0"/>
+              <a:t> </a:t>
+            </a:r>
+            <a:r>
+              <a:rPr dirty="0" err="1"/>
+              <a:t>điền</a:t>
+            </a:r>
+            <a:r>
+              <a:rPr dirty="0"/>
+              <a:t> </a:t>
+            </a:r>
+            <a:r>
+              <a:rPr dirty="0" err="1"/>
+              <a:t>cả</a:t>
+            </a:r>
+            <a:r>
+              <a:rPr dirty="0"/>
+              <a:t> </a:t>
+            </a:r>
+            <a:r>
+              <a:rPr dirty="0" err="1"/>
+              <a:t>cột</a:t>
+            </a:r>
+            <a:r>
+              <a:rPr dirty="0"/>
+              <a:t>.</a:t>
+            </a:r>
+          </a:p>
+          <a:p>
+            <a:r>
+              <a:rPr dirty="0" err="1"/>
+              <a:t>Tự</a:t>
+            </a:r>
+            <a:r>
+              <a:rPr dirty="0"/>
+              <a:t> </a:t>
+            </a:r>
+            <a:r>
+              <a:rPr dirty="0" err="1"/>
+              <a:t>kiểm</a:t>
+            </a:r>
+            <a:r>
+              <a:rPr dirty="0"/>
+              <a:t> </a:t>
+            </a:r>
+            <a:r>
+              <a:rPr dirty="0" err="1"/>
+              <a:t>tra</a:t>
+            </a:r>
+            <a:r>
+              <a:rPr dirty="0"/>
+              <a:t>: </a:t>
+            </a:r>
+            <a:r>
+              <a:rPr dirty="0" err="1"/>
+              <a:t>chọn</a:t>
+            </a:r>
+            <a:r>
+              <a:rPr dirty="0"/>
+              <a:t> </a:t>
+            </a:r>
+            <a:r>
+              <a:rPr dirty="0" err="1"/>
+              <a:t>cột</a:t>
+            </a:r>
+            <a:r>
+              <a:rPr dirty="0"/>
+              <a:t> COGS, Status Bar </a:t>
+            </a:r>
+            <a:r>
+              <a:rPr dirty="0" err="1"/>
+              <a:t>phải</a:t>
+            </a:r>
+            <a:r>
+              <a:rPr dirty="0"/>
+              <a:t> </a:t>
+            </a:r>
+            <a:r>
+              <a:rPr dirty="0" err="1"/>
+              <a:t>ra</a:t>
+            </a:r>
+            <a:r>
+              <a:rPr dirty="0"/>
+              <a:t> 619.663.000. </a:t>
+            </a:r>
+            <a:r>
+              <a:rPr dirty="0" err="1"/>
+              <a:t>Nếu</a:t>
+            </a:r>
+            <a:r>
+              <a:rPr dirty="0"/>
+              <a:t> </a:t>
+            </a:r>
+            <a:r>
+              <a:rPr dirty="0" err="1"/>
+              <a:t>bạn</a:t>
+            </a:r>
+            <a:r>
+              <a:rPr dirty="0"/>
+              <a:t> </a:t>
+            </a:r>
+            <a:r>
+              <a:rPr dirty="0" err="1"/>
+              <a:t>ra</a:t>
+            </a:r>
+            <a:r>
+              <a:rPr dirty="0"/>
+              <a:t> 617.871.000, </a:t>
+            </a:r>
+            <a:r>
+              <a:rPr dirty="0" err="1"/>
+              <a:t>thiếu</a:t>
+            </a:r>
+            <a:r>
+              <a:rPr dirty="0"/>
+              <a:t> </a:t>
+            </a:r>
+            <a:r>
+              <a:rPr dirty="0" err="1"/>
+              <a:t>đúng</a:t>
+            </a:r>
+            <a:r>
+              <a:rPr dirty="0"/>
+              <a:t> 1.792.000, </a:t>
+            </a:r>
+            <a:r>
+              <a:rPr dirty="0" err="1"/>
+              <a:t>thì</a:t>
+            </a:r>
+            <a:r>
+              <a:rPr dirty="0"/>
+              <a:t> </a:t>
+            </a:r>
+            <a:r>
+              <a:rPr dirty="0" err="1"/>
+              <a:t>bạn</a:t>
+            </a:r>
+            <a:r>
+              <a:rPr dirty="0"/>
+              <a:t> </a:t>
+            </a:r>
+            <a:r>
+              <a:rPr dirty="0" err="1"/>
+              <a:t>chưa</a:t>
+            </a:r>
+            <a:r>
+              <a:rPr dirty="0"/>
+              <a:t> </a:t>
+            </a:r>
+            <a:r>
+              <a:rPr dirty="0" err="1"/>
+              <a:t>xóa</a:t>
+            </a:r>
+            <a:r>
+              <a:rPr dirty="0"/>
+              <a:t> </a:t>
+            </a:r>
+            <a:r>
+              <a:rPr dirty="0" err="1"/>
+              <a:t>bản</a:t>
+            </a:r>
+            <a:r>
+              <a:rPr dirty="0"/>
+              <a:t> </a:t>
+            </a:r>
+            <a:r>
+              <a:rPr dirty="0" err="1"/>
+              <a:t>ghi</a:t>
+            </a:r>
+            <a:r>
+              <a:rPr dirty="0"/>
+              <a:t> P021 </a:t>
+            </a:r>
+            <a:r>
+              <a:rPr dirty="0" err="1"/>
+              <a:t>cũ</a:t>
+            </a:r>
+            <a:r>
+              <a:rPr dirty="0"/>
+              <a:t>.</a:t>
+            </a:r>
+          </a:p>
+          <a:p>
+            <a:r>
+              <a:rPr dirty="0"/>
               <a:t>GHI CHÚ GIẢNG VIÊN</a:t>
             </a:r>
           </a:p>
           <a:p>
             <a:r>
-              <a:t>Đi vòng lớp. Ba lỗi hay gặp nhất:</a:t>
-            </a:r>
-          </a:p>
-          <a:p>
-            <a:r>
-              <a:t>Chép Product bằng copy–paste vùng thay vì Move or Copy → mất tên bảng tblProduct; đặt lại tên trong Table Design.</a:t>
-            </a:r>
-          </a:p>
-          <a:p>
-            <a:r>
-              <a:t>Quên xóa P021 cũ (COGS 617.871.000).</a:t>
-            </a:r>
-          </a:p>
-          <a:p>
-            <a:r>
-              <a:t>Cột Thu ra số (ví dụ 45658) → ô đang định dạng Number; đổi về General.</a:t>
-            </a:r>
-          </a:p>
-          <a:p>
-            <a:r>
-              <a:t>Máy Excel 2016/2019 không có XLOOKUP, IFS: dùng INDEX/MATCH và IF lồng.</a:t>
-            </a:r>
-          </a:p>
-          <a:p>
-            <a:r>
-              <a:t>Ai xong sớm: làm trước Thực hành 2.</a:t>
+              <a:rPr dirty="0" err="1"/>
+              <a:t>Đi</a:t>
+            </a:r>
+            <a:r>
+              <a:rPr dirty="0"/>
+              <a:t> </a:t>
+            </a:r>
+            <a:r>
+              <a:rPr dirty="0" err="1"/>
+              <a:t>vòng</a:t>
+            </a:r>
+            <a:r>
+              <a:rPr dirty="0"/>
+              <a:t> </a:t>
+            </a:r>
+            <a:r>
+              <a:rPr dirty="0" err="1"/>
+              <a:t>lớp</a:t>
+            </a:r>
+            <a:r>
+              <a:rPr dirty="0"/>
+              <a:t>. Ba </a:t>
+            </a:r>
+            <a:r>
+              <a:rPr dirty="0" err="1"/>
+              <a:t>lỗi</a:t>
+            </a:r>
+            <a:r>
+              <a:rPr dirty="0"/>
+              <a:t> hay </a:t>
+            </a:r>
+            <a:r>
+              <a:rPr dirty="0" err="1"/>
+              <a:t>gặp</a:t>
+            </a:r>
+            <a:r>
+              <a:rPr dirty="0"/>
+              <a:t> </a:t>
+            </a:r>
+            <a:r>
+              <a:rPr dirty="0" err="1"/>
+              <a:t>nhất</a:t>
+            </a:r>
+            <a:r>
+              <a:rPr dirty="0"/>
+              <a:t>:</a:t>
+            </a:r>
+          </a:p>
+          <a:p>
+            <a:r>
+              <a:rPr dirty="0" err="1"/>
+              <a:t>Chép</a:t>
+            </a:r>
+            <a:r>
+              <a:rPr dirty="0"/>
+              <a:t> Product </a:t>
+            </a:r>
+            <a:r>
+              <a:rPr dirty="0" err="1"/>
+              <a:t>bằng</a:t>
+            </a:r>
+            <a:r>
+              <a:rPr dirty="0"/>
+              <a:t> copy–paste </a:t>
+            </a:r>
+            <a:r>
+              <a:rPr dirty="0" err="1"/>
+              <a:t>vùng</a:t>
+            </a:r>
+            <a:r>
+              <a:rPr dirty="0"/>
+              <a:t> </a:t>
+            </a:r>
+            <a:r>
+              <a:rPr dirty="0" err="1"/>
+              <a:t>thay</a:t>
+            </a:r>
+            <a:r>
+              <a:rPr dirty="0"/>
+              <a:t> </a:t>
+            </a:r>
+            <a:r>
+              <a:rPr dirty="0" err="1"/>
+              <a:t>vì</a:t>
+            </a:r>
+            <a:r>
+              <a:rPr dirty="0"/>
+              <a:t> Move or Copy → </a:t>
+            </a:r>
+            <a:r>
+              <a:rPr dirty="0" err="1"/>
+              <a:t>mất</a:t>
+            </a:r>
+            <a:r>
+              <a:rPr dirty="0"/>
+              <a:t> </a:t>
+            </a:r>
+            <a:r>
+              <a:rPr dirty="0" err="1"/>
+              <a:t>tên</a:t>
+            </a:r>
+            <a:r>
+              <a:rPr dirty="0"/>
+              <a:t> </a:t>
+            </a:r>
+            <a:r>
+              <a:rPr dirty="0" err="1"/>
+              <a:t>bảng</a:t>
+            </a:r>
+            <a:r>
+              <a:rPr dirty="0"/>
+              <a:t> </a:t>
+            </a:r>
+            <a:r>
+              <a:rPr dirty="0" err="1"/>
+              <a:t>tblProduct</a:t>
+            </a:r>
+            <a:r>
+              <a:rPr dirty="0"/>
+              <a:t>; </a:t>
+            </a:r>
+            <a:r>
+              <a:rPr dirty="0" err="1"/>
+              <a:t>đặt</a:t>
+            </a:r>
+            <a:r>
+              <a:rPr dirty="0"/>
+              <a:t> </a:t>
+            </a:r>
+            <a:r>
+              <a:rPr dirty="0" err="1"/>
+              <a:t>lại</a:t>
+            </a:r>
+            <a:r>
+              <a:rPr dirty="0"/>
+              <a:t> </a:t>
+            </a:r>
+            <a:r>
+              <a:rPr dirty="0" err="1"/>
+              <a:t>tên</a:t>
+            </a:r>
+            <a:r>
+              <a:rPr dirty="0"/>
+              <a:t> </a:t>
+            </a:r>
+            <a:r>
+              <a:rPr dirty="0" err="1"/>
+              <a:t>trong</a:t>
+            </a:r>
+            <a:r>
+              <a:rPr dirty="0"/>
+              <a:t> Table Design.</a:t>
+            </a:r>
+          </a:p>
+          <a:p>
+            <a:r>
+              <a:rPr dirty="0" err="1"/>
+              <a:t>Quên</a:t>
+            </a:r>
+            <a:r>
+              <a:rPr dirty="0"/>
+              <a:t> </a:t>
+            </a:r>
+            <a:r>
+              <a:rPr dirty="0" err="1"/>
+              <a:t>xóa</a:t>
+            </a:r>
+            <a:r>
+              <a:rPr dirty="0"/>
+              <a:t> P021 </a:t>
+            </a:r>
+            <a:r>
+              <a:rPr dirty="0" err="1"/>
+              <a:t>cũ</a:t>
+            </a:r>
+            <a:r>
+              <a:rPr dirty="0"/>
+              <a:t> (COGS 617.871.000).</a:t>
+            </a:r>
+          </a:p>
+          <a:p>
+            <a:r>
+              <a:rPr dirty="0" err="1"/>
+              <a:t>Cột</a:t>
+            </a:r>
+            <a:r>
+              <a:rPr dirty="0"/>
+              <a:t> Thu </a:t>
+            </a:r>
+            <a:r>
+              <a:rPr dirty="0" err="1"/>
+              <a:t>ra</a:t>
+            </a:r>
+            <a:r>
+              <a:rPr dirty="0"/>
+              <a:t> </a:t>
+            </a:r>
+            <a:r>
+              <a:rPr dirty="0" err="1"/>
+              <a:t>số</a:t>
+            </a:r>
+            <a:r>
+              <a:rPr dirty="0"/>
+              <a:t> (</a:t>
+            </a:r>
+            <a:r>
+              <a:rPr dirty="0" err="1"/>
+              <a:t>ví</a:t>
+            </a:r>
+            <a:r>
+              <a:rPr dirty="0"/>
+              <a:t> </a:t>
+            </a:r>
+            <a:r>
+              <a:rPr dirty="0" err="1"/>
+              <a:t>dụ</a:t>
+            </a:r>
+            <a:r>
+              <a:rPr dirty="0"/>
+              <a:t> 45658) → ô </a:t>
+            </a:r>
+            <a:r>
+              <a:rPr dirty="0" err="1"/>
+              <a:t>đang</a:t>
+            </a:r>
+            <a:r>
+              <a:rPr dirty="0"/>
+              <a:t> </a:t>
+            </a:r>
+            <a:r>
+              <a:rPr dirty="0" err="1"/>
+              <a:t>định</a:t>
+            </a:r>
+            <a:r>
+              <a:rPr dirty="0"/>
+              <a:t> </a:t>
+            </a:r>
+            <a:r>
+              <a:rPr dirty="0" err="1"/>
+              <a:t>dạng</a:t>
+            </a:r>
+            <a:r>
+              <a:rPr dirty="0"/>
+              <a:t> Number; </a:t>
+            </a:r>
+            <a:r>
+              <a:rPr dirty="0" err="1"/>
+              <a:t>đổi</a:t>
+            </a:r>
+            <a:r>
+              <a:rPr dirty="0"/>
+              <a:t> </a:t>
+            </a:r>
+            <a:r>
+              <a:rPr dirty="0" err="1"/>
+              <a:t>về</a:t>
+            </a:r>
+            <a:r>
+              <a:rPr dirty="0"/>
+              <a:t> General.</a:t>
+            </a:r>
+          </a:p>
+          <a:p>
+            <a:r>
+              <a:rPr dirty="0" err="1"/>
+              <a:t>Máy</a:t>
+            </a:r>
+            <a:r>
+              <a:rPr dirty="0"/>
+              <a:t> Excel 2016/2019 </a:t>
+            </a:r>
+            <a:r>
+              <a:rPr dirty="0" err="1"/>
+              <a:t>không</a:t>
+            </a:r>
+            <a:r>
+              <a:rPr dirty="0"/>
+              <a:t> </a:t>
+            </a:r>
+            <a:r>
+              <a:rPr dirty="0" err="1"/>
+              <a:t>có</a:t>
+            </a:r>
+            <a:r>
+              <a:rPr dirty="0"/>
+              <a:t> XLOOKUP, IFS: </a:t>
+            </a:r>
+            <a:r>
+              <a:rPr dirty="0" err="1"/>
+              <a:t>dùng</a:t>
+            </a:r>
+            <a:r>
+              <a:rPr dirty="0"/>
+              <a:t> INDEX/MATCH </a:t>
+            </a:r>
+            <a:r>
+              <a:rPr dirty="0" err="1"/>
+              <a:t>và</a:t>
+            </a:r>
+            <a:r>
+              <a:rPr dirty="0"/>
+              <a:t> IF </a:t>
+            </a:r>
+            <a:r>
+              <a:rPr dirty="0" err="1"/>
+              <a:t>lồng</a:t>
+            </a:r>
+            <a:r>
+              <a:rPr dirty="0"/>
+              <a:t>.</a:t>
+            </a:r>
+          </a:p>
+          <a:p>
+            <a:r>
+              <a:rPr dirty="0"/>
+              <a:t>Ai </a:t>
+            </a:r>
+            <a:r>
+              <a:rPr dirty="0" err="1"/>
+              <a:t>xong</a:t>
+            </a:r>
+            <a:r>
+              <a:rPr dirty="0"/>
+              <a:t> </a:t>
+            </a:r>
+            <a:r>
+              <a:rPr dirty="0" err="1"/>
+              <a:t>sớm</a:t>
+            </a:r>
+            <a:r>
+              <a:rPr dirty="0"/>
+              <a:t>: </a:t>
+            </a:r>
+            <a:r>
+              <a:rPr dirty="0" err="1"/>
+              <a:t>làm</a:t>
+            </a:r>
+            <a:r>
+              <a:rPr dirty="0"/>
+              <a:t> </a:t>
+            </a:r>
+            <a:r>
+              <a:rPr dirty="0" err="1"/>
+              <a:t>trước</a:t>
+            </a:r>
+            <a:r>
+              <a:rPr dirty="0"/>
+              <a:t> </a:t>
+            </a:r>
+            <a:r>
+              <a:rPr dirty="0" err="1"/>
+              <a:t>Thực</a:t>
+            </a:r>
+            <a:r>
+              <a:rPr dirty="0"/>
+              <a:t> </a:t>
+            </a:r>
+            <a:r>
+              <a:rPr dirty="0" err="1"/>
+              <a:t>hành</a:t>
+            </a:r>
+            <a:r>
+              <a:rPr dirty="0"/>
+              <a:t> 2.</a:t>
             </a:r>
           </a:p>
         </p:txBody>
@@ -10072,7 +11267,7 @@
           <a:p>
             <a:fld id="{2B9EE3C0-7C20-5445-A788-9AB5D82D90FB}" type="datetimeFigureOut">
               <a:rPr lang="en-US" smtClean="0"/>
-              <a:t>9/29/26</a:t>
+              <a:t>30/9/2026</a:t>
             </a:fld>
             <a:endParaRPr lang="en-US"/>
           </a:p>
@@ -10304,7 +11499,7 @@
           <a:p>
             <a:fld id="{2B9EE3C0-7C20-5445-A788-9AB5D82D90FB}" type="datetimeFigureOut">
               <a:rPr lang="en-US" smtClean="0"/>
-              <a:t>9/29/26</a:t>
+              <a:t>30/9/2026</a:t>
             </a:fld>
             <a:endParaRPr lang="en-US"/>
           </a:p>
@@ -10514,7 +11709,7 @@
           <a:p>
             <a:fld id="{2B9EE3C0-7C20-5445-A788-9AB5D82D90FB}" type="datetimeFigureOut">
               <a:rPr lang="en-US" smtClean="0"/>
-              <a:t>9/29/26</a:t>
+              <a:t>30/9/2026</a:t>
             </a:fld>
             <a:endParaRPr lang="en-US"/>
           </a:p>
@@ -10644,7 +11839,7 @@
           <a:p>
             <a:fld id="{2B9EE3C0-7C20-5445-A788-9AB5D82D90FB}" type="datetimeFigureOut">
               <a:rPr lang="en-US" smtClean="0"/>
-              <a:t>9/29/26</a:t>
+              <a:t>30/9/2026</a:t>
             </a:fld>
             <a:endParaRPr lang="en-US"/>
           </a:p>
@@ -10900,7 +12095,7 @@
           <a:p>
             <a:fld id="{2B9EE3C0-7C20-5445-A788-9AB5D82D90FB}" type="datetimeFigureOut">
               <a:rPr lang="en-US" smtClean="0"/>
-              <a:t>9/29/26</a:t>
+              <a:t>30/9/2026</a:t>
             </a:fld>
             <a:endParaRPr lang="en-US"/>
           </a:p>
@@ -11491,7 +12686,7 @@
           <a:p>
             <a:fld id="{2B9EE3C0-7C20-5445-A788-9AB5D82D90FB}" type="datetimeFigureOut">
               <a:rPr lang="en-US" smtClean="0"/>
-              <a:t>9/29/26</a:t>
+              <a:t>30/9/2026</a:t>
             </a:fld>
             <a:endParaRPr lang="en-US"/>
           </a:p>
@@ -11633,7 +12828,7 @@
           <a:p>
             <a:fld id="{2B9EE3C0-7C20-5445-A788-9AB5D82D90FB}" type="datetimeFigureOut">
               <a:rPr lang="en-US" smtClean="0"/>
-              <a:t>9/29/26</a:t>
+              <a:t>30/9/2026</a:t>
             </a:fld>
             <a:endParaRPr lang="en-US"/>
           </a:p>
@@ -11746,7 +12941,7 @@
           <a:p>
             <a:fld id="{2B9EE3C0-7C20-5445-A788-9AB5D82D90FB}" type="datetimeFigureOut">
               <a:rPr lang="en-US" smtClean="0"/>
-              <a:t>9/29/26</a:t>
+              <a:t>30/9/2026</a:t>
             </a:fld>
             <a:endParaRPr lang="en-US"/>
           </a:p>
@@ -12059,7 +13254,7 @@
           <a:p>
             <a:fld id="{2B9EE3C0-7C20-5445-A788-9AB5D82D90FB}" type="datetimeFigureOut">
               <a:rPr lang="en-US" smtClean="0"/>
-              <a:t>9/29/26</a:t>
+              <a:t>30/9/2026</a:t>
             </a:fld>
             <a:endParaRPr lang="en-US"/>
           </a:p>
@@ -12348,7 +13543,7 @@
           <a:p>
             <a:fld id="{2B9EE3C0-7C20-5445-A788-9AB5D82D90FB}" type="datetimeFigureOut">
               <a:rPr lang="en-US" smtClean="0"/>
-              <a:t>9/29/26</a:t>
+              <a:t>30/9/2026</a:t>
             </a:fld>
             <a:endParaRPr lang="en-US"/>
           </a:p>
@@ -12618,7 +13813,7 @@
           <a:p>
             <a:fld id="{2B9EE3C0-7C20-5445-A788-9AB5D82D90FB}" type="datetimeFigureOut">
               <a:rPr lang="en-US" smtClean="0"/>
-              <a:t>9/29/26</a:t>
+              <a:t>30/9/2026</a:t>
             </a:fld>
             <a:endParaRPr lang="en-US"/>
           </a:p>
@@ -13369,13 +14564,76 @@
           <a:lstStyle/>
           <a:p>
             <a:r>
-              <a:rPr sz="1600" b="0">
+              <a:rPr sz="1600" b="0" dirty="0" err="1">
                 <a:solidFill>
                   <a:srgbClr val="585858"/>
                 </a:solidFill>
                 <a:latin typeface="Arial"/>
               </a:rPr>
-              <a:t>Đếm ô số / ô không trống.</a:t>
+              <a:t>Đếm</a:t>
+            </a:r>
+            <a:r>
+              <a:rPr sz="1600" b="0" dirty="0">
+                <a:solidFill>
+                  <a:srgbClr val="585858"/>
+                </a:solidFill>
+                <a:latin typeface="Arial"/>
+              </a:rPr>
+              <a:t> ô </a:t>
+            </a:r>
+            <a:r>
+              <a:rPr sz="1600" b="0" dirty="0" err="1">
+                <a:solidFill>
+                  <a:srgbClr val="585858"/>
+                </a:solidFill>
+                <a:latin typeface="Arial"/>
+              </a:rPr>
+              <a:t>số</a:t>
+            </a:r>
+            <a:r>
+              <a:rPr sz="1600" b="0" dirty="0">
+                <a:solidFill>
+                  <a:srgbClr val="585858"/>
+                </a:solidFill>
+                <a:latin typeface="Arial"/>
+              </a:rPr>
+              <a:t> / ô </a:t>
+            </a:r>
+            <a:r>
+              <a:rPr sz="1600" b="0" dirty="0" err="1">
+                <a:solidFill>
+                  <a:srgbClr val="585858"/>
+                </a:solidFill>
+                <a:latin typeface="Arial"/>
+              </a:rPr>
+              <a:t>không</a:t>
+            </a:r>
+            <a:r>
+              <a:rPr sz="1600" b="0" dirty="0">
+                <a:solidFill>
+                  <a:srgbClr val="585858"/>
+                </a:solidFill>
+                <a:latin typeface="Arial"/>
+              </a:rPr>
+              <a:t> </a:t>
+            </a:r>
+            <a:r>
+              <a:rPr sz="1600" b="0" dirty="0" err="1">
+                <a:solidFill>
+                  <a:srgbClr val="585858"/>
+                </a:solidFill>
+                <a:latin typeface="Arial"/>
+              </a:rPr>
+              <a:t>trống</a:t>
+            </a:r>
+            <a:r>
+              <a:rPr sz="1600" b="0" dirty="0">
+                <a:solidFill>
+                  <a:srgbClr val="585858"/>
+                </a:solidFill>
+                <a:latin typeface="Arial"/>
+              </a:rPr>
+              <a:t>.</a:t>
             </a:r>
           </a:p>
         </p:txBody>
@@ -14179,13 +15437,607 @@
           <a:lstStyle/>
           <a:p>
             <a:r>
-              <a:rPr sz="1600" b="0">
+              <a:rPr sz="1600" b="0" dirty="0">
                 <a:solidFill>
                   <a:srgbClr val="1B2230"/>
                 </a:solidFill>
                 <a:latin typeface="Arial"/>
               </a:rPr>
-              <a:t>Trung bình lớn hơn trung vị khoảng 51% → vài đơn rất lớn kéo trung bình lên (lệch phải). Chọn con số theo câu hỏi: “khách thường chi bao nhiêu” → trung vị; AOV nhân ngược ra doanh thu → trung bình.</a:t>
+              <a:t>Trung </a:t>
+            </a:r>
+            <a:r>
+              <a:rPr sz="1600" b="0" dirty="0" err="1">
+                <a:solidFill>
+                  <a:srgbClr val="1B2230"/>
+                </a:solidFill>
+                <a:latin typeface="Arial"/>
+              </a:rPr>
+              <a:t>bình</a:t>
+            </a:r>
+            <a:r>
+              <a:rPr sz="1600" b="0" dirty="0">
+                <a:solidFill>
+                  <a:srgbClr val="1B2230"/>
+                </a:solidFill>
+                <a:latin typeface="Arial"/>
+              </a:rPr>
+              <a:t> </a:t>
+            </a:r>
+            <a:r>
+              <a:rPr sz="1600" b="0" dirty="0" err="1">
+                <a:solidFill>
+                  <a:srgbClr val="1B2230"/>
+                </a:solidFill>
+                <a:latin typeface="Arial"/>
+              </a:rPr>
+              <a:t>lớn</a:t>
+            </a:r>
+            <a:r>
+              <a:rPr sz="1600" b="0" dirty="0">
+                <a:solidFill>
+                  <a:srgbClr val="1B2230"/>
+                </a:solidFill>
+                <a:latin typeface="Arial"/>
+              </a:rPr>
+              <a:t> </a:t>
+            </a:r>
+            <a:r>
+              <a:rPr sz="1600" b="0" dirty="0" err="1">
+                <a:solidFill>
+                  <a:srgbClr val="1B2230"/>
+                </a:solidFill>
+                <a:latin typeface="Arial"/>
+              </a:rPr>
+              <a:t>hơn</a:t>
+            </a:r>
+            <a:r>
+              <a:rPr sz="1600" b="0" dirty="0">
+                <a:solidFill>
+                  <a:srgbClr val="1B2230"/>
+                </a:solidFill>
+                <a:latin typeface="Arial"/>
+              </a:rPr>
+              <a:t> </a:t>
+            </a:r>
+            <a:r>
+              <a:rPr sz="1600" b="0" dirty="0" err="1">
+                <a:solidFill>
+                  <a:srgbClr val="1B2230"/>
+                </a:solidFill>
+                <a:latin typeface="Arial"/>
+              </a:rPr>
+              <a:t>trung</a:t>
+            </a:r>
+            <a:r>
+              <a:rPr sz="1600" b="0" dirty="0">
+                <a:solidFill>
+                  <a:srgbClr val="1B2230"/>
+                </a:solidFill>
+                <a:latin typeface="Arial"/>
+              </a:rPr>
+              <a:t> </a:t>
+            </a:r>
+            <a:r>
+              <a:rPr sz="1600" b="0" dirty="0" err="1">
+                <a:solidFill>
+                  <a:srgbClr val="1B2230"/>
+                </a:solidFill>
+                <a:latin typeface="Arial"/>
+              </a:rPr>
+              <a:t>vị</a:t>
+            </a:r>
+            <a:r>
+              <a:rPr sz="1600" b="0" dirty="0">
+                <a:solidFill>
+                  <a:srgbClr val="1B2230"/>
+                </a:solidFill>
+                <a:latin typeface="Arial"/>
+              </a:rPr>
+              <a:t> </a:t>
+            </a:r>
+            <a:r>
+              <a:rPr sz="1600" b="0" dirty="0" err="1">
+                <a:solidFill>
+                  <a:srgbClr val="1B2230"/>
+                </a:solidFill>
+                <a:latin typeface="Arial"/>
+              </a:rPr>
+              <a:t>khoảng</a:t>
+            </a:r>
+            <a:r>
+              <a:rPr sz="1600" b="0" dirty="0">
+                <a:solidFill>
+                  <a:srgbClr val="1B2230"/>
+                </a:solidFill>
+                <a:latin typeface="Arial"/>
+              </a:rPr>
+              <a:t> 51% → </a:t>
+            </a:r>
+            <a:r>
+              <a:rPr sz="1600" b="0" dirty="0" err="1">
+                <a:solidFill>
+                  <a:srgbClr val="1B2230"/>
+                </a:solidFill>
+                <a:latin typeface="Arial"/>
+              </a:rPr>
+              <a:t>vài</a:t>
+            </a:r>
+            <a:r>
+              <a:rPr sz="1600" b="0" dirty="0">
+                <a:solidFill>
+                  <a:srgbClr val="1B2230"/>
+                </a:solidFill>
+                <a:latin typeface="Arial"/>
+              </a:rPr>
+              <a:t> </a:t>
+            </a:r>
+            <a:r>
+              <a:rPr sz="1600" b="0" dirty="0" err="1">
+                <a:solidFill>
+                  <a:srgbClr val="1B2230"/>
+                </a:solidFill>
+                <a:latin typeface="Arial"/>
+              </a:rPr>
+              <a:t>đơn</a:t>
+            </a:r>
+            <a:r>
+              <a:rPr sz="1600" b="0" dirty="0">
+                <a:solidFill>
+                  <a:srgbClr val="1B2230"/>
+                </a:solidFill>
+                <a:latin typeface="Arial"/>
+              </a:rPr>
+              <a:t> </a:t>
+            </a:r>
+            <a:r>
+              <a:rPr sz="1600" b="0" dirty="0" err="1">
+                <a:solidFill>
+                  <a:srgbClr val="1B2230"/>
+                </a:solidFill>
+                <a:latin typeface="Arial"/>
+              </a:rPr>
+              <a:t>rất</a:t>
+            </a:r>
+            <a:r>
+              <a:rPr sz="1600" b="0" dirty="0">
+                <a:solidFill>
+                  <a:srgbClr val="1B2230"/>
+                </a:solidFill>
+                <a:latin typeface="Arial"/>
+              </a:rPr>
+              <a:t> </a:t>
+            </a:r>
+            <a:r>
+              <a:rPr sz="1600" b="0" dirty="0" err="1">
+                <a:solidFill>
+                  <a:srgbClr val="1B2230"/>
+                </a:solidFill>
+                <a:latin typeface="Arial"/>
+              </a:rPr>
+              <a:t>lớn</a:t>
+            </a:r>
+            <a:r>
+              <a:rPr sz="1600" b="0" dirty="0">
+                <a:solidFill>
+                  <a:srgbClr val="1B2230"/>
+                </a:solidFill>
+                <a:latin typeface="Arial"/>
+              </a:rPr>
+              <a:t> </a:t>
+            </a:r>
+            <a:r>
+              <a:rPr sz="1600" b="0" dirty="0" err="1">
+                <a:solidFill>
+                  <a:srgbClr val="1B2230"/>
+                </a:solidFill>
+                <a:latin typeface="Arial"/>
+              </a:rPr>
+              <a:t>kéo</a:t>
+            </a:r>
+            <a:r>
+              <a:rPr sz="1600" b="0" dirty="0">
+                <a:solidFill>
+                  <a:srgbClr val="1B2230"/>
+                </a:solidFill>
+                <a:latin typeface="Arial"/>
+              </a:rPr>
+              <a:t> </a:t>
+            </a:r>
+            <a:r>
+              <a:rPr sz="1600" b="0" dirty="0" err="1">
+                <a:solidFill>
+                  <a:srgbClr val="1B2230"/>
+                </a:solidFill>
+                <a:latin typeface="Arial"/>
+              </a:rPr>
+              <a:t>trung</a:t>
+            </a:r>
+            <a:r>
+              <a:rPr sz="1600" b="0" dirty="0">
+                <a:solidFill>
+                  <a:srgbClr val="1B2230"/>
+                </a:solidFill>
+                <a:latin typeface="Arial"/>
+              </a:rPr>
+              <a:t> </a:t>
+            </a:r>
+            <a:r>
+              <a:rPr sz="1600" b="0" dirty="0" err="1">
+                <a:solidFill>
+                  <a:srgbClr val="1B2230"/>
+                </a:solidFill>
+                <a:latin typeface="Arial"/>
+              </a:rPr>
+              <a:t>bình</a:t>
+            </a:r>
+            <a:r>
+              <a:rPr sz="1600" b="0" dirty="0">
+                <a:solidFill>
+                  <a:srgbClr val="1B2230"/>
+                </a:solidFill>
+                <a:latin typeface="Arial"/>
+              </a:rPr>
+              <a:t> </a:t>
+            </a:r>
+            <a:r>
+              <a:rPr sz="1600" b="0" dirty="0" err="1">
+                <a:solidFill>
+                  <a:srgbClr val="1B2230"/>
+                </a:solidFill>
+                <a:latin typeface="Arial"/>
+              </a:rPr>
+              <a:t>lên</a:t>
+            </a:r>
+            <a:r>
+              <a:rPr sz="1600" b="0" dirty="0">
+                <a:solidFill>
+                  <a:srgbClr val="1B2230"/>
+                </a:solidFill>
+                <a:latin typeface="Arial"/>
+              </a:rPr>
+              <a:t> (</a:t>
+            </a:r>
+            <a:r>
+              <a:rPr sz="1600" b="0" dirty="0" err="1">
+                <a:solidFill>
+                  <a:srgbClr val="1B2230"/>
+                </a:solidFill>
+                <a:latin typeface="Arial"/>
+              </a:rPr>
+              <a:t>lệch</a:t>
+            </a:r>
+            <a:r>
+              <a:rPr sz="1600" b="0" dirty="0">
+                <a:solidFill>
+                  <a:srgbClr val="1B2230"/>
+                </a:solidFill>
+                <a:latin typeface="Arial"/>
+              </a:rPr>
+              <a:t> </a:t>
+            </a:r>
+            <a:r>
+              <a:rPr sz="1600" b="0" dirty="0" err="1">
+                <a:solidFill>
+                  <a:srgbClr val="1B2230"/>
+                </a:solidFill>
+                <a:latin typeface="Arial"/>
+              </a:rPr>
+              <a:t>phải</a:t>
+            </a:r>
+            <a:r>
+              <a:rPr sz="1600" b="0" dirty="0">
+                <a:solidFill>
+                  <a:srgbClr val="1B2230"/>
+                </a:solidFill>
+                <a:latin typeface="Arial"/>
+              </a:rPr>
+              <a:t>). </a:t>
+            </a:r>
+            <a:r>
+              <a:rPr sz="1600" b="0" dirty="0" err="1">
+                <a:solidFill>
+                  <a:srgbClr val="1B2230"/>
+                </a:solidFill>
+                <a:latin typeface="Arial"/>
+              </a:rPr>
+              <a:t>Chọn</a:t>
+            </a:r>
+            <a:r>
+              <a:rPr sz="1600" b="0" dirty="0">
+                <a:solidFill>
+                  <a:srgbClr val="1B2230"/>
+                </a:solidFill>
+                <a:latin typeface="Arial"/>
+              </a:rPr>
+              <a:t> con </a:t>
+            </a:r>
+            <a:r>
+              <a:rPr sz="1600" b="0" dirty="0" err="1">
+                <a:solidFill>
+                  <a:srgbClr val="1B2230"/>
+                </a:solidFill>
+                <a:latin typeface="Arial"/>
+              </a:rPr>
+              <a:t>số</a:t>
+            </a:r>
+            <a:r>
+              <a:rPr sz="1600" b="0" dirty="0">
+                <a:solidFill>
+                  <a:srgbClr val="1B2230"/>
+                </a:solidFill>
+                <a:latin typeface="Arial"/>
+              </a:rPr>
+              <a:t> </a:t>
+            </a:r>
+            <a:r>
+              <a:rPr sz="1600" b="0" dirty="0" err="1">
+                <a:solidFill>
+                  <a:srgbClr val="1B2230"/>
+                </a:solidFill>
+                <a:latin typeface="Arial"/>
+              </a:rPr>
+              <a:t>theo</a:t>
+            </a:r>
+            <a:r>
+              <a:rPr sz="1600" b="0" dirty="0">
+                <a:solidFill>
+                  <a:srgbClr val="1B2230"/>
+                </a:solidFill>
+                <a:latin typeface="Arial"/>
+              </a:rPr>
+              <a:t> </a:t>
+            </a:r>
+            <a:r>
+              <a:rPr sz="1600" b="0" dirty="0" err="1">
+                <a:solidFill>
+                  <a:srgbClr val="1B2230"/>
+                </a:solidFill>
+                <a:latin typeface="Arial"/>
+              </a:rPr>
+              <a:t>câu</a:t>
+            </a:r>
+            <a:r>
+              <a:rPr sz="1600" b="0" dirty="0">
+                <a:solidFill>
+                  <a:srgbClr val="1B2230"/>
+                </a:solidFill>
+                <a:latin typeface="Arial"/>
+              </a:rPr>
+              <a:t> </a:t>
+            </a:r>
+            <a:r>
+              <a:rPr sz="1600" b="0" dirty="0" err="1">
+                <a:solidFill>
+                  <a:srgbClr val="1B2230"/>
+                </a:solidFill>
+                <a:latin typeface="Arial"/>
+              </a:rPr>
+              <a:t>hỏi</a:t>
+            </a:r>
+            <a:r>
+              <a:rPr sz="1600" b="0" dirty="0">
+                <a:solidFill>
+                  <a:srgbClr val="1B2230"/>
+                </a:solidFill>
+                <a:latin typeface="Arial"/>
+              </a:rPr>
+              <a:t>: “</a:t>
+            </a:r>
+            <a:r>
+              <a:rPr sz="1600" b="0" dirty="0" err="1">
+                <a:solidFill>
+                  <a:srgbClr val="1B2230"/>
+                </a:solidFill>
+                <a:latin typeface="Arial"/>
+              </a:rPr>
+              <a:t>khách</a:t>
+            </a:r>
+            <a:r>
+              <a:rPr sz="1600" b="0" dirty="0">
+                <a:solidFill>
+                  <a:srgbClr val="1B2230"/>
+                </a:solidFill>
+                <a:latin typeface="Arial"/>
+              </a:rPr>
+              <a:t> </a:t>
+            </a:r>
+            <a:r>
+              <a:rPr sz="1600" b="0" dirty="0" err="1">
+                <a:solidFill>
+                  <a:srgbClr val="1B2230"/>
+                </a:solidFill>
+                <a:latin typeface="Arial"/>
+              </a:rPr>
+              <a:t>thường</a:t>
+            </a:r>
+            <a:r>
+              <a:rPr sz="1600" b="0" dirty="0">
+                <a:solidFill>
+                  <a:srgbClr val="1B2230"/>
+                </a:solidFill>
+                <a:latin typeface="Arial"/>
+              </a:rPr>
+              <a:t> chi bao </a:t>
+            </a:r>
+            <a:r>
+              <a:rPr sz="1600" b="0" dirty="0" err="1">
+                <a:solidFill>
+                  <a:srgbClr val="1B2230"/>
+                </a:solidFill>
+                <a:latin typeface="Arial"/>
+              </a:rPr>
+              <a:t>nhiêu</a:t>
+            </a:r>
+            <a:r>
+              <a:rPr sz="1600" b="0" dirty="0">
+                <a:solidFill>
+                  <a:srgbClr val="1B2230"/>
+                </a:solidFill>
+                <a:latin typeface="Arial"/>
+              </a:rPr>
+              <a:t>” → </a:t>
+            </a:r>
+            <a:r>
+              <a:rPr sz="1600" b="0" dirty="0" err="1">
+                <a:solidFill>
+                  <a:srgbClr val="1B2230"/>
+                </a:solidFill>
+                <a:latin typeface="Arial"/>
+              </a:rPr>
+              <a:t>trung</a:t>
+            </a:r>
+            <a:r>
+              <a:rPr sz="1600" b="0" dirty="0">
+                <a:solidFill>
+                  <a:srgbClr val="1B2230"/>
+                </a:solidFill>
+                <a:latin typeface="Arial"/>
+              </a:rPr>
+              <a:t> </a:t>
+            </a:r>
+            <a:r>
+              <a:rPr sz="1600" b="0" dirty="0" err="1">
+                <a:solidFill>
+                  <a:srgbClr val="1B2230"/>
+                </a:solidFill>
+                <a:latin typeface="Arial"/>
+              </a:rPr>
+              <a:t>vị</a:t>
+            </a:r>
+            <a:r>
+              <a:rPr sz="1600" b="0" dirty="0">
+                <a:solidFill>
+                  <a:srgbClr val="1B2230"/>
+                </a:solidFill>
+                <a:latin typeface="Arial"/>
+              </a:rPr>
+              <a:t>; AOV </a:t>
+            </a:r>
+            <a:r>
+              <a:rPr sz="1600" b="0" dirty="0" err="1">
+                <a:solidFill>
+                  <a:srgbClr val="1B2230"/>
+                </a:solidFill>
+                <a:latin typeface="Arial"/>
+              </a:rPr>
+              <a:t>nhân</a:t>
+            </a:r>
+            <a:r>
+              <a:rPr sz="1600" b="0" dirty="0">
+                <a:solidFill>
+                  <a:srgbClr val="1B2230"/>
+                </a:solidFill>
+                <a:latin typeface="Arial"/>
+              </a:rPr>
+              <a:t> </a:t>
+            </a:r>
+            <a:r>
+              <a:rPr sz="1600" b="0" dirty="0" err="1">
+                <a:solidFill>
+                  <a:srgbClr val="1B2230"/>
+                </a:solidFill>
+                <a:latin typeface="Arial"/>
+              </a:rPr>
+              <a:t>ngược</a:t>
+            </a:r>
+            <a:r>
+              <a:rPr sz="1600" b="0" dirty="0">
+                <a:solidFill>
+                  <a:srgbClr val="1B2230"/>
+                </a:solidFill>
+                <a:latin typeface="Arial"/>
+              </a:rPr>
+              <a:t> </a:t>
+            </a:r>
+            <a:r>
+              <a:rPr sz="1600" b="0" dirty="0" err="1">
+                <a:solidFill>
+                  <a:srgbClr val="1B2230"/>
+                </a:solidFill>
+                <a:latin typeface="Arial"/>
+              </a:rPr>
+              <a:t>ra</a:t>
+            </a:r>
+            <a:r>
+              <a:rPr sz="1600" b="0" dirty="0">
+                <a:solidFill>
+                  <a:srgbClr val="1B2230"/>
+                </a:solidFill>
+                <a:latin typeface="Arial"/>
+              </a:rPr>
+              <a:t> </a:t>
+            </a:r>
+            <a:r>
+              <a:rPr sz="1600" b="0" dirty="0" err="1">
+                <a:solidFill>
+                  <a:srgbClr val="1B2230"/>
+                </a:solidFill>
+                <a:latin typeface="Arial"/>
+              </a:rPr>
+              <a:t>doanh</a:t>
+            </a:r>
+            <a:r>
+              <a:rPr sz="1600" b="0" dirty="0">
+                <a:solidFill>
+                  <a:srgbClr val="1B2230"/>
+                </a:solidFill>
+                <a:latin typeface="Arial"/>
+              </a:rPr>
+              <a:t> </a:t>
+            </a:r>
+            <a:r>
+              <a:rPr sz="1600" b="0" dirty="0" err="1">
+                <a:solidFill>
+                  <a:srgbClr val="1B2230"/>
+                </a:solidFill>
+                <a:latin typeface="Arial"/>
+              </a:rPr>
+              <a:t>thu</a:t>
+            </a:r>
+            <a:r>
+              <a:rPr sz="1600" b="0" dirty="0">
+                <a:solidFill>
+                  <a:srgbClr val="1B2230"/>
+                </a:solidFill>
+                <a:latin typeface="Arial"/>
+              </a:rPr>
+              <a:t> → </a:t>
+            </a:r>
+            <a:r>
+              <a:rPr sz="1600" b="0" dirty="0" err="1">
+                <a:solidFill>
+                  <a:srgbClr val="1B2230"/>
+                </a:solidFill>
+                <a:latin typeface="Arial"/>
+              </a:rPr>
+              <a:t>trung</a:t>
+            </a:r>
+            <a:r>
+              <a:rPr sz="1600" b="0" dirty="0">
+                <a:solidFill>
+                  <a:srgbClr val="1B2230"/>
+                </a:solidFill>
+                <a:latin typeface="Arial"/>
+              </a:rPr>
+              <a:t> </a:t>
+            </a:r>
+            <a:r>
+              <a:rPr sz="1600" b="0" dirty="0" err="1">
+                <a:solidFill>
+                  <a:srgbClr val="1B2230"/>
+                </a:solidFill>
+                <a:latin typeface="Arial"/>
+              </a:rPr>
+              <a:t>bình</a:t>
+            </a:r>
+            <a:r>
+              <a:rPr sz="1600" b="0" dirty="0">
+                <a:solidFill>
+                  <a:srgbClr val="1B2230"/>
+                </a:solidFill>
+                <a:latin typeface="Arial"/>
+              </a:rPr>
+              <a:t>.</a:t>
             </a:r>
           </a:p>
         </p:txBody>
@@ -14810,7 +16662,7 @@
           <a:p>
             <a:pPr algn="ctr"/>
             <a:r>
-              <a:rPr sz="1300" b="0">
+              <a:rPr sz="1300" b="0" dirty="0">
                 <a:solidFill>
                   <a:srgbClr val="585858"/>
                 </a:solidFill>
@@ -14952,7 +16804,7 @@
           <a:p>
             <a:pPr algn="ctr"/>
             <a:r>
-              <a:rPr sz="1300" b="0">
+              <a:rPr sz="1300" b="0" dirty="0">
                 <a:solidFill>
                   <a:srgbClr val="585858"/>
                 </a:solidFill>
@@ -15176,13 +17028,67 @@
           <a:lstStyle/>
           <a:p>
             <a:r>
-              <a:rPr sz="1500" b="1">
+              <a:rPr sz="1500" b="1" dirty="0">
                 <a:solidFill>
                   <a:srgbClr val="9C0006"/>
                 </a:solidFill>
                 <a:latin typeface="Arial"/>
               </a:rPr>
-              <a:t>138 đơn vượt ngưỡng = Q3 + 1,5 × (Q3 − Q1)</a:t>
+              <a:t>138 </a:t>
+            </a:r>
+            <a:r>
+              <a:rPr sz="1500" b="1" dirty="0" err="1">
+                <a:solidFill>
+                  <a:srgbClr val="9C0006"/>
+                </a:solidFill>
+                <a:latin typeface="Arial"/>
+              </a:rPr>
+              <a:t>đơn</a:t>
+            </a:r>
+            <a:r>
+              <a:rPr sz="1500" b="1" dirty="0">
+                <a:solidFill>
+                  <a:srgbClr val="9C0006"/>
+                </a:solidFill>
+                <a:latin typeface="Arial"/>
+              </a:rPr>
+              <a:t> </a:t>
+            </a:r>
+            <a:r>
+              <a:rPr sz="1500" b="1" dirty="0" err="1">
+                <a:solidFill>
+                  <a:srgbClr val="9C0006"/>
+                </a:solidFill>
+                <a:latin typeface="Arial"/>
+              </a:rPr>
+              <a:t>vượt</a:t>
+            </a:r>
+            <a:r>
+              <a:rPr sz="1500" b="1" dirty="0">
+                <a:solidFill>
+                  <a:srgbClr val="9C0006"/>
+                </a:solidFill>
+                <a:latin typeface="Arial"/>
+              </a:rPr>
+              <a:t> </a:t>
+            </a:r>
+            <a:r>
+              <a:rPr sz="1500" b="1" dirty="0" err="1">
+                <a:solidFill>
+                  <a:srgbClr val="9C0006"/>
+                </a:solidFill>
+                <a:latin typeface="Arial"/>
+              </a:rPr>
+              <a:t>ngưỡng</a:t>
+            </a:r>
+            <a:r>
+              <a:rPr sz="1500" b="1" dirty="0">
+                <a:solidFill>
+                  <a:srgbClr val="9C0006"/>
+                </a:solidFill>
+                <a:latin typeface="Arial"/>
+              </a:rPr>
+              <a:t> = Q3 + 1,5 × (Q3 − Q1)</a:t>
             </a:r>
           </a:p>
         </p:txBody>
@@ -15555,13 +17461,373 @@
           <a:lstStyle/>
           <a:p>
             <a:r>
-              <a:rPr sz="1600" b="0">
+              <a:rPr sz="1600" b="0" dirty="0">
                 <a:solidFill>
                   <a:srgbClr val="1B2230"/>
                 </a:solidFill>
                 <a:latin typeface="Arial"/>
               </a:rPr>
-              <a:t>Outlier không phải “lỗi để xóa”: có thể là khách mua quà Tết, mua sỉ. Giải thích trước, quyết định sau.</a:t>
+              <a:t>Outlier </a:t>
+            </a:r>
+            <a:r>
+              <a:rPr sz="1600" b="0" dirty="0" err="1">
+                <a:solidFill>
+                  <a:srgbClr val="1B2230"/>
+                </a:solidFill>
+                <a:latin typeface="Arial"/>
+              </a:rPr>
+              <a:t>không</a:t>
+            </a:r>
+            <a:r>
+              <a:rPr sz="1600" b="0" dirty="0">
+                <a:solidFill>
+                  <a:srgbClr val="1B2230"/>
+                </a:solidFill>
+                <a:latin typeface="Arial"/>
+              </a:rPr>
+              <a:t> </a:t>
+            </a:r>
+            <a:r>
+              <a:rPr sz="1600" b="0" dirty="0" err="1">
+                <a:solidFill>
+                  <a:srgbClr val="1B2230"/>
+                </a:solidFill>
+                <a:latin typeface="Arial"/>
+              </a:rPr>
+              <a:t>phải</a:t>
+            </a:r>
+            <a:r>
+              <a:rPr sz="1600" b="0" dirty="0">
+                <a:solidFill>
+                  <a:srgbClr val="1B2230"/>
+                </a:solidFill>
+                <a:latin typeface="Arial"/>
+              </a:rPr>
+              <a:t> “</a:t>
+            </a:r>
+            <a:r>
+              <a:rPr sz="1600" b="0" dirty="0" err="1">
+                <a:solidFill>
+                  <a:srgbClr val="1B2230"/>
+                </a:solidFill>
+                <a:latin typeface="Arial"/>
+              </a:rPr>
+              <a:t>lỗi</a:t>
+            </a:r>
+            <a:r>
+              <a:rPr sz="1600" b="0" dirty="0">
+                <a:solidFill>
+                  <a:srgbClr val="1B2230"/>
+                </a:solidFill>
+                <a:latin typeface="Arial"/>
+              </a:rPr>
+              <a:t> </a:t>
+            </a:r>
+            <a:r>
+              <a:rPr sz="1600" b="0" dirty="0" err="1">
+                <a:solidFill>
+                  <a:srgbClr val="1B2230"/>
+                </a:solidFill>
+                <a:latin typeface="Arial"/>
+              </a:rPr>
+              <a:t>để</a:t>
+            </a:r>
+            <a:r>
+              <a:rPr sz="1600" b="0" dirty="0">
+                <a:solidFill>
+                  <a:srgbClr val="1B2230"/>
+                </a:solidFill>
+                <a:latin typeface="Arial"/>
+              </a:rPr>
+              <a:t> </a:t>
+            </a:r>
+            <a:r>
+              <a:rPr sz="1600" b="0" dirty="0" err="1">
+                <a:solidFill>
+                  <a:srgbClr val="1B2230"/>
+                </a:solidFill>
+                <a:latin typeface="Arial"/>
+              </a:rPr>
+              <a:t>xóa</a:t>
+            </a:r>
+            <a:r>
+              <a:rPr sz="1600" b="0" dirty="0">
+                <a:solidFill>
+                  <a:srgbClr val="1B2230"/>
+                </a:solidFill>
+                <a:latin typeface="Arial"/>
+              </a:rPr>
+              <a:t>”: </a:t>
+            </a:r>
+            <a:r>
+              <a:rPr sz="1600" b="0" dirty="0" err="1">
+                <a:solidFill>
+                  <a:srgbClr val="1B2230"/>
+                </a:solidFill>
+                <a:latin typeface="Arial"/>
+              </a:rPr>
+              <a:t>có</a:t>
+            </a:r>
+            <a:r>
+              <a:rPr sz="1600" b="0" dirty="0">
+                <a:solidFill>
+                  <a:srgbClr val="1B2230"/>
+                </a:solidFill>
+                <a:latin typeface="Arial"/>
+              </a:rPr>
+              <a:t> </a:t>
+            </a:r>
+            <a:r>
+              <a:rPr sz="1600" b="0" dirty="0" err="1">
+                <a:solidFill>
+                  <a:srgbClr val="1B2230"/>
+                </a:solidFill>
+                <a:latin typeface="Arial"/>
+              </a:rPr>
+              <a:t>thể</a:t>
+            </a:r>
+            <a:r>
+              <a:rPr sz="1600" b="0" dirty="0">
+                <a:solidFill>
+                  <a:srgbClr val="1B2230"/>
+                </a:solidFill>
+                <a:latin typeface="Arial"/>
+              </a:rPr>
+              <a:t> </a:t>
+            </a:r>
+            <a:r>
+              <a:rPr sz="1600" b="0" dirty="0" err="1">
+                <a:solidFill>
+                  <a:srgbClr val="1B2230"/>
+                </a:solidFill>
+                <a:latin typeface="Arial"/>
+              </a:rPr>
+              <a:t>là</a:t>
+            </a:r>
+            <a:r>
+              <a:rPr sz="1600" b="0" dirty="0">
+                <a:solidFill>
+                  <a:srgbClr val="1B2230"/>
+                </a:solidFill>
+                <a:latin typeface="Arial"/>
+              </a:rPr>
+              <a:t> </a:t>
+            </a:r>
+            <a:r>
+              <a:rPr sz="1600" b="0" dirty="0" err="1">
+                <a:solidFill>
+                  <a:srgbClr val="1B2230"/>
+                </a:solidFill>
+                <a:latin typeface="Arial"/>
+              </a:rPr>
+              <a:t>khách</a:t>
+            </a:r>
+            <a:r>
+              <a:rPr sz="1600" b="0" dirty="0">
+                <a:solidFill>
+                  <a:srgbClr val="1B2230"/>
+                </a:solidFill>
+                <a:latin typeface="Arial"/>
+              </a:rPr>
+              <a:t> </a:t>
+            </a:r>
+            <a:r>
+              <a:rPr sz="1600" b="0" dirty="0" err="1">
+                <a:solidFill>
+                  <a:srgbClr val="1B2230"/>
+                </a:solidFill>
+                <a:latin typeface="Arial"/>
+              </a:rPr>
+              <a:t>mua</a:t>
+            </a:r>
+            <a:r>
+              <a:rPr sz="1600" b="0" dirty="0">
+                <a:solidFill>
+                  <a:srgbClr val="1B2230"/>
+                </a:solidFill>
+                <a:latin typeface="Arial"/>
+              </a:rPr>
+              <a:t> </a:t>
+            </a:r>
+            <a:r>
+              <a:rPr sz="1600" b="0" dirty="0" err="1">
+                <a:solidFill>
+                  <a:srgbClr val="1B2230"/>
+                </a:solidFill>
+                <a:latin typeface="Arial"/>
+              </a:rPr>
+              <a:t>quà</a:t>
+            </a:r>
+            <a:r>
+              <a:rPr sz="1600" b="0" dirty="0">
+                <a:solidFill>
+                  <a:srgbClr val="1B2230"/>
+                </a:solidFill>
+                <a:latin typeface="Arial"/>
+              </a:rPr>
+              <a:t> </a:t>
+            </a:r>
+            <a:r>
+              <a:rPr sz="1600" b="0" dirty="0" err="1">
+                <a:solidFill>
+                  <a:srgbClr val="1B2230"/>
+                </a:solidFill>
+                <a:latin typeface="Arial"/>
+              </a:rPr>
+              <a:t>Tết</a:t>
+            </a:r>
+            <a:r>
+              <a:rPr sz="1600" b="0" dirty="0">
+                <a:solidFill>
+                  <a:srgbClr val="1B2230"/>
+                </a:solidFill>
+                <a:latin typeface="Arial"/>
+              </a:rPr>
+              <a:t>, </a:t>
+            </a:r>
+            <a:r>
+              <a:rPr sz="1600" b="0" dirty="0" err="1">
+                <a:solidFill>
+                  <a:srgbClr val="1B2230"/>
+                </a:solidFill>
+                <a:latin typeface="Arial"/>
+              </a:rPr>
+              <a:t>mua</a:t>
+            </a:r>
+            <a:r>
+              <a:rPr sz="1600" b="0" dirty="0">
+                <a:solidFill>
+                  <a:srgbClr val="1B2230"/>
+                </a:solidFill>
+                <a:latin typeface="Arial"/>
+              </a:rPr>
+              <a:t> </a:t>
+            </a:r>
+            <a:r>
+              <a:rPr sz="1600" b="0" dirty="0" err="1">
+                <a:solidFill>
+                  <a:srgbClr val="1B2230"/>
+                </a:solidFill>
+                <a:latin typeface="Arial"/>
+              </a:rPr>
+              <a:t>sỉ</a:t>
+            </a:r>
+            <a:r>
+              <a:rPr sz="1600" b="0" dirty="0">
+                <a:solidFill>
+                  <a:srgbClr val="1B2230"/>
+                </a:solidFill>
+                <a:latin typeface="Arial"/>
+              </a:rPr>
+              <a:t>. </a:t>
+            </a:r>
+            <a:r>
+              <a:rPr sz="1600" b="0" dirty="0" err="1">
+                <a:solidFill>
+                  <a:srgbClr val="1B2230"/>
+                </a:solidFill>
+                <a:latin typeface="Arial"/>
+              </a:rPr>
+              <a:t>Giải</a:t>
+            </a:r>
+            <a:r>
+              <a:rPr sz="1600" b="0" dirty="0">
+                <a:solidFill>
+                  <a:srgbClr val="1B2230"/>
+                </a:solidFill>
+                <a:latin typeface="Arial"/>
+              </a:rPr>
+              <a:t> </a:t>
+            </a:r>
+            <a:r>
+              <a:rPr sz="1600" b="0" dirty="0" err="1">
+                <a:solidFill>
+                  <a:srgbClr val="1B2230"/>
+                </a:solidFill>
+                <a:latin typeface="Arial"/>
+              </a:rPr>
+              <a:t>thích</a:t>
+            </a:r>
+            <a:r>
+              <a:rPr sz="1600" b="0" dirty="0">
+                <a:solidFill>
+                  <a:srgbClr val="1B2230"/>
+                </a:solidFill>
+                <a:latin typeface="Arial"/>
+              </a:rPr>
+              <a:t> </a:t>
+            </a:r>
+            <a:r>
+              <a:rPr sz="1600" b="0" dirty="0" err="1">
+                <a:solidFill>
+                  <a:srgbClr val="1B2230"/>
+                </a:solidFill>
+                <a:latin typeface="Arial"/>
+              </a:rPr>
+              <a:t>trước</a:t>
+            </a:r>
+            <a:r>
+              <a:rPr sz="1600" b="0" dirty="0">
+                <a:solidFill>
+                  <a:srgbClr val="1B2230"/>
+                </a:solidFill>
+                <a:latin typeface="Arial"/>
+              </a:rPr>
+              <a:t>, </a:t>
+            </a:r>
+            <a:r>
+              <a:rPr sz="1600" b="0" dirty="0" err="1">
+                <a:solidFill>
+                  <a:srgbClr val="1B2230"/>
+                </a:solidFill>
+                <a:latin typeface="Arial"/>
+              </a:rPr>
+              <a:t>quyết</a:t>
+            </a:r>
+            <a:r>
+              <a:rPr sz="1600" b="0" dirty="0">
+                <a:solidFill>
+                  <a:srgbClr val="1B2230"/>
+                </a:solidFill>
+                <a:latin typeface="Arial"/>
+              </a:rPr>
+              <a:t> </a:t>
+            </a:r>
+            <a:r>
+              <a:rPr sz="1600" b="0" dirty="0" err="1">
+                <a:solidFill>
+                  <a:srgbClr val="1B2230"/>
+                </a:solidFill>
+                <a:latin typeface="Arial"/>
+              </a:rPr>
+              <a:t>định</a:t>
+            </a:r>
+            <a:r>
+              <a:rPr sz="1600" b="0" dirty="0">
+                <a:solidFill>
+                  <a:srgbClr val="1B2230"/>
+                </a:solidFill>
+                <a:latin typeface="Arial"/>
+              </a:rPr>
+              <a:t> </a:t>
+            </a:r>
+            <a:r>
+              <a:rPr sz="1600" b="0" dirty="0" err="1">
+                <a:solidFill>
+                  <a:srgbClr val="1B2230"/>
+                </a:solidFill>
+                <a:latin typeface="Arial"/>
+              </a:rPr>
+              <a:t>sau</a:t>
+            </a:r>
+            <a:r>
+              <a:rPr sz="1600" b="0" dirty="0">
+                <a:solidFill>
+                  <a:srgbClr val="1B2230"/>
+                </a:solidFill>
+                <a:latin typeface="Arial"/>
+              </a:rPr>
+              <a:t>.</a:t>
             </a:r>
           </a:p>
         </p:txBody>
@@ -16274,13 +18540,22 @@
           <a:p>
             <a:pPr algn="ctr"/>
             <a:r>
-              <a:rPr sz="1800" b="1">
+              <a:rPr sz="1800" b="1" dirty="0" err="1">
                 <a:solidFill>
                   <a:srgbClr val="203864"/>
                 </a:solidFill>
                 <a:latin typeface="Arial"/>
               </a:rPr>
-              <a:t>tblSales[Revenue]</a:t>
+              <a:t>tblSales</a:t>
+            </a:r>
+            <a:r>
+              <a:rPr sz="1800" b="1" dirty="0">
+                <a:solidFill>
+                  <a:srgbClr val="203864"/>
+                </a:solidFill>
+                <a:latin typeface="Arial"/>
+              </a:rPr>
+              <a:t>[Revenue]</a:t>
             </a:r>
           </a:p>
           <a:p>
@@ -16290,14 +18565,29 @@
               </a:spcBef>
             </a:pPr>
             <a:r>
-              <a:rPr sz="1800" b="0">
+              <a:rPr sz="1800" b="0" dirty="0">
                 <a:solidFill>
                   <a:srgbClr val="1B2230"/>
                 </a:solidFill>
                 <a:latin typeface="Arial"/>
               </a:rPr>
-              <a:t>6.187 dòng</a:t>
-            </a:r>
+              <a:t>6.187 </a:t>
+            </a:r>
+            <a:r>
+              <a:rPr sz="1800" b="0" dirty="0" err="1">
+                <a:solidFill>
+                  <a:srgbClr val="1B2230"/>
+                </a:solidFill>
+                <a:latin typeface="Arial"/>
+              </a:rPr>
+              <a:t>dòng</a:t>
+            </a:r>
+            <a:endParaRPr sz="1800" b="0" dirty="0">
+              <a:solidFill>
+                <a:srgbClr val="1B2230"/>
+              </a:solidFill>
+              <a:latin typeface="Arial"/>
+            </a:endParaRPr>
           </a:p>
           <a:p>
             <a:pPr algn="ctr">
@@ -16306,14 +18596,47 @@
               </a:spcBef>
             </a:pPr>
             <a:r>
-              <a:rPr sz="1800" b="1">
+              <a:rPr sz="1800" b="1" dirty="0">
                 <a:solidFill>
                   <a:srgbClr val="1B2230"/>
                 </a:solidFill>
                 <a:latin typeface="Arial"/>
               </a:rPr>
-              <a:t>∑ phép tổng</a:t>
-            </a:r>
+              <a:t>∑ </a:t>
+            </a:r>
+            <a:r>
+              <a:rPr sz="1800" b="1" dirty="0" err="1">
+                <a:solidFill>
+                  <a:srgbClr val="1B2230"/>
+                </a:solidFill>
+                <a:latin typeface="Arial"/>
+              </a:rPr>
+              <a:t>phép</a:t>
+            </a:r>
+            <a:r>
+              <a:rPr sz="1800" b="1" dirty="0">
+                <a:solidFill>
+                  <a:srgbClr val="1B2230"/>
+                </a:solidFill>
+                <a:latin typeface="Arial"/>
+              </a:rPr>
+              <a:t> </a:t>
+            </a:r>
+            <a:r>
+              <a:rPr sz="1800" b="1" dirty="0" err="1">
+                <a:solidFill>
+                  <a:srgbClr val="1B2230"/>
+                </a:solidFill>
+                <a:latin typeface="Arial"/>
+              </a:rPr>
+              <a:t>tổng</a:t>
+            </a:r>
+            <a:endParaRPr sz="1800" b="1" dirty="0">
+              <a:solidFill>
+                <a:srgbClr val="1B2230"/>
+              </a:solidFill>
+              <a:latin typeface="Arial"/>
+            </a:endParaRPr>
           </a:p>
         </p:txBody>
       </p:sp>
@@ -16390,22 +18713,58 @@
           <a:p>
             <a:pPr algn="ctr"/>
             <a:r>
-              <a:rPr sz="1400" b="0">
+              <a:rPr sz="1400" b="0" dirty="0" err="1">
                 <a:solidFill>
                   <a:srgbClr val="585858"/>
                 </a:solidFill>
                 <a:latin typeface="Arial"/>
               </a:rPr>
-              <a:t>Bộ lọc  </a:t>
-            </a:r>
-            <a:r>
-              <a:rPr sz="2000" b="1">
+              <a:t>Bộ</a:t>
+            </a:r>
+            <a:r>
+              <a:rPr sz="1400" b="0" dirty="0">
+                <a:solidFill>
+                  <a:srgbClr val="585858"/>
+                </a:solidFill>
+                <a:latin typeface="Arial"/>
+              </a:rPr>
+              <a:t> </a:t>
+            </a:r>
+            <a:r>
+              <a:rPr sz="1400" b="0" dirty="0" err="1">
+                <a:solidFill>
+                  <a:srgbClr val="585858"/>
+                </a:solidFill>
+                <a:latin typeface="Arial"/>
+              </a:rPr>
+              <a:t>lọc</a:t>
+            </a:r>
+            <a:r>
+              <a:rPr sz="1400" b="0" dirty="0">
+                <a:solidFill>
+                  <a:srgbClr val="585858"/>
+                </a:solidFill>
+                <a:latin typeface="Arial"/>
+              </a:rPr>
+              <a:t>  </a:t>
+            </a:r>
+            <a:r>
+              <a:rPr sz="2000" b="1" dirty="0" err="1">
                 <a:solidFill>
                   <a:srgbClr val="203864"/>
                 </a:solidFill>
                 <a:latin typeface="Arial"/>
               </a:rPr>
-              <a:t>Vùng = Bắc</a:t>
+              <a:t>Vùng</a:t>
+            </a:r>
+            <a:r>
+              <a:rPr sz="2000" b="1" dirty="0">
+                <a:solidFill>
+                  <a:srgbClr val="203864"/>
+                </a:solidFill>
+                <a:latin typeface="Arial"/>
+              </a:rPr>
+              <a:t> = Bắc</a:t>
             </a:r>
           </a:p>
         </p:txBody>
@@ -16483,22 +18842,58 @@
           <a:p>
             <a:pPr algn="ctr"/>
             <a:r>
-              <a:rPr sz="1400" b="0">
+              <a:rPr sz="1400" b="0" dirty="0" err="1">
                 <a:solidFill>
                   <a:srgbClr val="585858"/>
                 </a:solidFill>
                 <a:latin typeface="Arial"/>
               </a:rPr>
-              <a:t>Bộ lọc  </a:t>
-            </a:r>
-            <a:r>
-              <a:rPr sz="2000" b="1">
+              <a:t>Bộ</a:t>
+            </a:r>
+            <a:r>
+              <a:rPr sz="1400" b="0" dirty="0">
+                <a:solidFill>
+                  <a:srgbClr val="585858"/>
+                </a:solidFill>
+                <a:latin typeface="Arial"/>
+              </a:rPr>
+              <a:t> </a:t>
+            </a:r>
+            <a:r>
+              <a:rPr sz="1400" b="0" dirty="0" err="1">
+                <a:solidFill>
+                  <a:srgbClr val="585858"/>
+                </a:solidFill>
+                <a:latin typeface="Arial"/>
+              </a:rPr>
+              <a:t>lọc</a:t>
+            </a:r>
+            <a:r>
+              <a:rPr sz="1400" b="0" dirty="0">
+                <a:solidFill>
+                  <a:srgbClr val="585858"/>
+                </a:solidFill>
+                <a:latin typeface="Arial"/>
+              </a:rPr>
+              <a:t>  </a:t>
+            </a:r>
+            <a:r>
+              <a:rPr sz="2000" b="1" dirty="0" err="1">
                 <a:solidFill>
                   <a:srgbClr val="203864"/>
                 </a:solidFill>
                 <a:latin typeface="Arial"/>
               </a:rPr>
-              <a:t>Tháng = 3</a:t>
+              <a:t>Tháng</a:t>
+            </a:r>
+            <a:r>
+              <a:rPr sz="2000" b="1" dirty="0">
+                <a:solidFill>
+                  <a:srgbClr val="203864"/>
+                </a:solidFill>
+                <a:latin typeface="Arial"/>
+              </a:rPr>
+              <a:t> = 3</a:t>
             </a:r>
           </a:p>
         </p:txBody>
@@ -16712,14 +19107,56 @@
           <a:p>
             <a:pPr algn="ctr"/>
             <a:r>
-              <a:rPr sz="1400" b="0">
+              <a:rPr sz="1400" b="0" dirty="0" err="1">
                 <a:solidFill>
                   <a:srgbClr val="CDE2FB"/>
                 </a:solidFill>
                 <a:latin typeface="Arial"/>
               </a:rPr>
-              <a:t>Một ô kết quả</a:t>
-            </a:r>
+              <a:t>Một</a:t>
+            </a:r>
+            <a:r>
+              <a:rPr sz="1400" b="0" dirty="0">
+                <a:solidFill>
+                  <a:srgbClr val="CDE2FB"/>
+                </a:solidFill>
+                <a:latin typeface="Arial"/>
+              </a:rPr>
+              <a:t> ô </a:t>
+            </a:r>
+            <a:r>
+              <a:rPr sz="1400" b="0" dirty="0" err="1">
+                <a:solidFill>
+                  <a:srgbClr val="CDE2FB"/>
+                </a:solidFill>
+                <a:latin typeface="Arial"/>
+              </a:rPr>
+              <a:t>kết</a:t>
+            </a:r>
+            <a:r>
+              <a:rPr sz="1400" b="0" dirty="0">
+                <a:solidFill>
+                  <a:srgbClr val="CDE2FB"/>
+                </a:solidFill>
+                <a:latin typeface="Arial"/>
+              </a:rPr>
+              <a:t> </a:t>
+            </a:r>
+            <a:r>
+              <a:rPr sz="1400" b="0" dirty="0" err="1">
+                <a:solidFill>
+                  <a:srgbClr val="CDE2FB"/>
+                </a:solidFill>
+                <a:latin typeface="Arial"/>
+              </a:rPr>
+              <a:t>quả</a:t>
+            </a:r>
+            <a:endParaRPr sz="1400" b="0" dirty="0">
+              <a:solidFill>
+                <a:srgbClr val="CDE2FB"/>
+              </a:solidFill>
+              <a:latin typeface="Arial"/>
+            </a:endParaRPr>
           </a:p>
           <a:p>
             <a:pPr algn="ctr">
@@ -16728,7 +19165,7 @@
               </a:spcBef>
             </a:pPr>
             <a:r>
-              <a:rPr sz="3000" b="1">
+              <a:rPr sz="3000" b="1" dirty="0">
                 <a:solidFill>
                   <a:srgbClr val="FFFFFF"/>
                 </a:solidFill>
@@ -16864,7 +19301,7 @@
                     <a:p>
                       <a:pPr algn="ctr"/>
                       <a:r>
-                        <a:rPr sz="1700" b="1">
+                        <a:rPr sz="1700" b="1" dirty="0">
                           <a:solidFill>
                             <a:srgbClr val="FFFFFF"/>
                           </a:solidFill>
@@ -17029,7 +19466,7 @@
                     <a:p>
                       <a:pPr algn="ctr"/>
                       <a:r>
-                        <a:rPr sz="1700" b="0">
+                        <a:rPr sz="1700" b="0" dirty="0">
                           <a:solidFill>
                             <a:srgbClr val="1B2230"/>
                           </a:solidFill>
@@ -17092,13 +19529,166 @@
           <a:lstStyle/>
           <a:p>
             <a:r>
-              <a:rPr sz="1600" b="0">
+              <a:rPr sz="1600" b="0" dirty="0" err="1">
                 <a:solidFill>
                   <a:srgbClr val="585858"/>
                 </a:solidFill>
                 <a:latin typeface="Arial"/>
               </a:rPr>
-              <a:t>Cùng một ý, ba cái tên. Kiểm chứng: Filter Bắc + tháng 3 → Status Bar Sum = 90.210.000 (635 dòng).</a:t>
+              <a:t>Cùng</a:t>
+            </a:r>
+            <a:r>
+              <a:rPr sz="1600" b="0" dirty="0">
+                <a:solidFill>
+                  <a:srgbClr val="585858"/>
+                </a:solidFill>
+                <a:latin typeface="Arial"/>
+              </a:rPr>
+              <a:t> </a:t>
+            </a:r>
+            <a:r>
+              <a:rPr sz="1600" b="0" dirty="0" err="1">
+                <a:solidFill>
+                  <a:srgbClr val="585858"/>
+                </a:solidFill>
+                <a:latin typeface="Arial"/>
+              </a:rPr>
+              <a:t>một</a:t>
+            </a:r>
+            <a:r>
+              <a:rPr sz="1600" b="0" dirty="0">
+                <a:solidFill>
+                  <a:srgbClr val="585858"/>
+                </a:solidFill>
+                <a:latin typeface="Arial"/>
+              </a:rPr>
+              <a:t> ý, </a:t>
+            </a:r>
+            <a:r>
+              <a:rPr sz="1600" b="0" dirty="0" err="1">
+                <a:solidFill>
+                  <a:srgbClr val="585858"/>
+                </a:solidFill>
+                <a:latin typeface="Arial"/>
+              </a:rPr>
+              <a:t>ba</a:t>
+            </a:r>
+            <a:r>
+              <a:rPr sz="1600" b="0" dirty="0">
+                <a:solidFill>
+                  <a:srgbClr val="585858"/>
+                </a:solidFill>
+                <a:latin typeface="Arial"/>
+              </a:rPr>
+              <a:t> </a:t>
+            </a:r>
+            <a:r>
+              <a:rPr sz="1600" b="0" dirty="0" err="1">
+                <a:solidFill>
+                  <a:srgbClr val="585858"/>
+                </a:solidFill>
+                <a:latin typeface="Arial"/>
+              </a:rPr>
+              <a:t>cái</a:t>
+            </a:r>
+            <a:r>
+              <a:rPr sz="1600" b="0" dirty="0">
+                <a:solidFill>
+                  <a:srgbClr val="585858"/>
+                </a:solidFill>
+                <a:latin typeface="Arial"/>
+              </a:rPr>
+              <a:t> </a:t>
+            </a:r>
+            <a:r>
+              <a:rPr sz="1600" b="0" dirty="0" err="1">
+                <a:solidFill>
+                  <a:srgbClr val="585858"/>
+                </a:solidFill>
+                <a:latin typeface="Arial"/>
+              </a:rPr>
+              <a:t>tên</a:t>
+            </a:r>
+            <a:r>
+              <a:rPr sz="1600" b="0" dirty="0">
+                <a:solidFill>
+                  <a:srgbClr val="585858"/>
+                </a:solidFill>
+                <a:latin typeface="Arial"/>
+              </a:rPr>
+              <a:t>. </a:t>
+            </a:r>
+            <a:r>
+              <a:rPr sz="1600" b="0" dirty="0" err="1">
+                <a:solidFill>
+                  <a:srgbClr val="585858"/>
+                </a:solidFill>
+                <a:latin typeface="Arial"/>
+              </a:rPr>
+              <a:t>Kiểm</a:t>
+            </a:r>
+            <a:r>
+              <a:rPr sz="1600" b="0" dirty="0">
+                <a:solidFill>
+                  <a:srgbClr val="585858"/>
+                </a:solidFill>
+                <a:latin typeface="Arial"/>
+              </a:rPr>
+              <a:t> </a:t>
+            </a:r>
+            <a:r>
+              <a:rPr sz="1600" b="0" dirty="0" err="1">
+                <a:solidFill>
+                  <a:srgbClr val="585858"/>
+                </a:solidFill>
+                <a:latin typeface="Arial"/>
+              </a:rPr>
+              <a:t>chứng</a:t>
+            </a:r>
+            <a:r>
+              <a:rPr sz="1600" b="0" dirty="0">
+                <a:solidFill>
+                  <a:srgbClr val="585858"/>
+                </a:solidFill>
+                <a:latin typeface="Arial"/>
+              </a:rPr>
+              <a:t>: Filter Bắc + </a:t>
+            </a:r>
+            <a:r>
+              <a:rPr sz="1600" b="0" dirty="0" err="1">
+                <a:solidFill>
+                  <a:srgbClr val="585858"/>
+                </a:solidFill>
+                <a:latin typeface="Arial"/>
+              </a:rPr>
+              <a:t>tháng</a:t>
+            </a:r>
+            <a:r>
+              <a:rPr sz="1600" b="0" dirty="0">
+                <a:solidFill>
+                  <a:srgbClr val="585858"/>
+                </a:solidFill>
+                <a:latin typeface="Arial"/>
+              </a:rPr>
+              <a:t> 3 → Status Bar Sum = 90.210.000 (635 </a:t>
+            </a:r>
+            <a:r>
+              <a:rPr sz="1600" b="0" dirty="0" err="1">
+                <a:solidFill>
+                  <a:srgbClr val="585858"/>
+                </a:solidFill>
+                <a:latin typeface="Arial"/>
+              </a:rPr>
+              <a:t>dòng</a:t>
+            </a:r>
+            <a:r>
+              <a:rPr sz="1600" b="0" dirty="0">
+                <a:solidFill>
+                  <a:srgbClr val="585858"/>
+                </a:solidFill>
+                <a:latin typeface="Arial"/>
+              </a:rPr>
+              <a:t>).</a:t>
             </a:r>
           </a:p>
         </p:txBody>
@@ -20275,7 +22865,7 @@
           <a:lstStyle/>
           <a:p>
             <a:r>
-              <a:rPr sz="1600" b="0">
+              <a:rPr sz="1600" b="0" dirty="0">
                 <a:solidFill>
                   <a:srgbClr val="1B2230"/>
                 </a:solidFill>
@@ -20717,7 +23307,7 @@
           <a:lstStyle/>
           <a:p>
             <a:r>
-              <a:rPr sz="1600" b="0">
+              <a:rPr sz="1600" b="0" dirty="0">
                 <a:solidFill>
                   <a:srgbClr val="1B2230"/>
                 </a:solidFill>
@@ -21264,7 +23854,7 @@
         </p:nvGraphicFramePr>
         <p:xfrm>
           <a:off x="1527048" y="2971800"/>
-          <a:ext cx="5577840" cy="2194560"/>
+          <a:ext cx="5577840" cy="2310384"/>
         </p:xfrm>
         <a:graphic>
           <a:graphicData uri="http://schemas.openxmlformats.org/drawingml/2006/table">
@@ -22411,22 +25001,220 @@
           <a:lstStyle/>
           <a:p>
             <a:r>
-              <a:rPr sz="1600" b="1">
+              <a:rPr sz="1600" b="1" dirty="0" err="1">
                 <a:solidFill>
                   <a:srgbClr val="203864"/>
                 </a:solidFill>
                 <a:latin typeface="Arial"/>
               </a:rPr>
-              <a:t>Luật 1 · </a:t>
-            </a:r>
-            <a:r>
-              <a:rPr sz="1600" b="0">
+              <a:t>Luật</a:t>
+            </a:r>
+            <a:r>
+              <a:rPr sz="1600" b="1" dirty="0">
+                <a:solidFill>
+                  <a:srgbClr val="203864"/>
+                </a:solidFill>
+                <a:latin typeface="Arial"/>
+              </a:rPr>
+              <a:t> 1 · </a:t>
+            </a:r>
+            <a:r>
+              <a:rPr sz="1600" b="0" dirty="0" err="1">
                 <a:solidFill>
                   <a:srgbClr val="1B2230"/>
                 </a:solidFill>
                 <a:latin typeface="Arial"/>
               </a:rPr>
-              <a:t>Khóa ở bảng tra phải DUY NHẤT. Trùng khóa → lấy dòng ĐẦU TIÊN, không báo lỗi.</a:t>
+              <a:t>Khóa</a:t>
+            </a:r>
+            <a:r>
+              <a:rPr sz="1600" b="0" dirty="0">
+                <a:solidFill>
+                  <a:srgbClr val="1B2230"/>
+                </a:solidFill>
+                <a:latin typeface="Arial"/>
+              </a:rPr>
+              <a:t> ở </a:t>
+            </a:r>
+            <a:r>
+              <a:rPr sz="1600" b="0" dirty="0" err="1">
+                <a:solidFill>
+                  <a:srgbClr val="1B2230"/>
+                </a:solidFill>
+                <a:latin typeface="Arial"/>
+              </a:rPr>
+              <a:t>bảng</a:t>
+            </a:r>
+            <a:r>
+              <a:rPr sz="1600" b="0" dirty="0">
+                <a:solidFill>
+                  <a:srgbClr val="1B2230"/>
+                </a:solidFill>
+                <a:latin typeface="Arial"/>
+              </a:rPr>
+              <a:t> </a:t>
+            </a:r>
+            <a:r>
+              <a:rPr sz="1600" b="0" dirty="0" err="1">
+                <a:solidFill>
+                  <a:srgbClr val="1B2230"/>
+                </a:solidFill>
+                <a:latin typeface="Arial"/>
+              </a:rPr>
+              <a:t>tra</a:t>
+            </a:r>
+            <a:r>
+              <a:rPr sz="1600" b="0" dirty="0">
+                <a:solidFill>
+                  <a:srgbClr val="1B2230"/>
+                </a:solidFill>
+                <a:latin typeface="Arial"/>
+              </a:rPr>
+              <a:t> </a:t>
+            </a:r>
+            <a:r>
+              <a:rPr sz="1600" b="0" dirty="0" err="1">
+                <a:solidFill>
+                  <a:srgbClr val="1B2230"/>
+                </a:solidFill>
+                <a:latin typeface="Arial"/>
+              </a:rPr>
+              <a:t>phải</a:t>
+            </a:r>
+            <a:r>
+              <a:rPr sz="1600" b="0" dirty="0">
+                <a:solidFill>
+                  <a:srgbClr val="1B2230"/>
+                </a:solidFill>
+                <a:latin typeface="Arial"/>
+              </a:rPr>
+              <a:t> DUY NHẤT. </a:t>
+            </a:r>
+            <a:r>
+              <a:rPr sz="1600" b="0" dirty="0" err="1">
+                <a:solidFill>
+                  <a:srgbClr val="1B2230"/>
+                </a:solidFill>
+                <a:latin typeface="Arial"/>
+              </a:rPr>
+              <a:t>Trùng</a:t>
+            </a:r>
+            <a:r>
+              <a:rPr sz="1600" b="0" dirty="0">
+                <a:solidFill>
+                  <a:srgbClr val="1B2230"/>
+                </a:solidFill>
+                <a:latin typeface="Arial"/>
+              </a:rPr>
+              <a:t> </a:t>
+            </a:r>
+            <a:r>
+              <a:rPr sz="1600" b="0" dirty="0" err="1">
+                <a:solidFill>
+                  <a:srgbClr val="1B2230"/>
+                </a:solidFill>
+                <a:latin typeface="Arial"/>
+              </a:rPr>
+              <a:t>khóa</a:t>
+            </a:r>
+            <a:r>
+              <a:rPr sz="1600" b="0" dirty="0">
+                <a:solidFill>
+                  <a:srgbClr val="1B2230"/>
+                </a:solidFill>
+                <a:latin typeface="Arial"/>
+              </a:rPr>
+              <a:t> → </a:t>
+            </a:r>
+            <a:r>
+              <a:rPr sz="1600" b="0" dirty="0" err="1">
+                <a:solidFill>
+                  <a:srgbClr val="1B2230"/>
+                </a:solidFill>
+                <a:latin typeface="Arial"/>
+              </a:rPr>
+              <a:t>lấy</a:t>
+            </a:r>
+            <a:r>
+              <a:rPr sz="1600" b="0" dirty="0">
+                <a:solidFill>
+                  <a:srgbClr val="1B2230"/>
+                </a:solidFill>
+                <a:latin typeface="Arial"/>
+              </a:rPr>
+              <a:t> </a:t>
+            </a:r>
+            <a:r>
+              <a:rPr sz="1600" b="0" dirty="0" err="1">
+                <a:solidFill>
+                  <a:srgbClr val="1B2230"/>
+                </a:solidFill>
+                <a:latin typeface="Arial"/>
+              </a:rPr>
+              <a:t>dòng</a:t>
+            </a:r>
+            <a:r>
+              <a:rPr sz="1600" b="0" dirty="0">
+                <a:solidFill>
+                  <a:srgbClr val="1B2230"/>
+                </a:solidFill>
+                <a:latin typeface="Arial"/>
+              </a:rPr>
+              <a:t> ĐẦU TIÊN, </a:t>
+            </a:r>
+            <a:r>
+              <a:rPr sz="1600" b="0" dirty="0" err="1">
+                <a:solidFill>
+                  <a:srgbClr val="1B2230"/>
+                </a:solidFill>
+                <a:latin typeface="Arial"/>
+              </a:rPr>
+              <a:t>không</a:t>
+            </a:r>
+            <a:r>
+              <a:rPr sz="1600" b="0" dirty="0">
+                <a:solidFill>
+                  <a:srgbClr val="1B2230"/>
+                </a:solidFill>
+                <a:latin typeface="Arial"/>
+              </a:rPr>
+              <a:t> </a:t>
+            </a:r>
+            <a:r>
+              <a:rPr sz="1600" b="0" dirty="0" err="1">
+                <a:solidFill>
+                  <a:srgbClr val="1B2230"/>
+                </a:solidFill>
+                <a:latin typeface="Arial"/>
+              </a:rPr>
+              <a:t>báo</a:t>
+            </a:r>
+            <a:r>
+              <a:rPr sz="1600" b="0" dirty="0">
+                <a:solidFill>
+                  <a:srgbClr val="1B2230"/>
+                </a:solidFill>
+                <a:latin typeface="Arial"/>
+              </a:rPr>
+              <a:t> </a:t>
+            </a:r>
+            <a:r>
+              <a:rPr sz="1600" b="0" dirty="0" err="1">
+                <a:solidFill>
+                  <a:srgbClr val="1B2230"/>
+                </a:solidFill>
+                <a:latin typeface="Arial"/>
+              </a:rPr>
+              <a:t>lỗi</a:t>
+            </a:r>
+            <a:r>
+              <a:rPr sz="1600" b="0" dirty="0">
+                <a:solidFill>
+                  <a:srgbClr val="1B2230"/>
+                </a:solidFill>
+                <a:latin typeface="Arial"/>
+              </a:rPr>
+              <a:t>.</a:t>
             </a:r>
           </a:p>
           <a:p>
@@ -22436,22 +25224,184 @@
               </a:spcBef>
             </a:pPr>
             <a:r>
-              <a:rPr sz="1600" b="1">
+              <a:rPr sz="1600" b="1" dirty="0" err="1">
                 <a:solidFill>
                   <a:srgbClr val="203864"/>
                 </a:solidFill>
                 <a:latin typeface="Arial"/>
               </a:rPr>
-              <a:t>Luật 2 · </a:t>
-            </a:r>
-            <a:r>
-              <a:rPr sz="1600" b="0">
+              <a:t>Luật</a:t>
+            </a:r>
+            <a:r>
+              <a:rPr sz="1600" b="1" dirty="0">
+                <a:solidFill>
+                  <a:srgbClr val="203864"/>
+                </a:solidFill>
+                <a:latin typeface="Arial"/>
+              </a:rPr>
+              <a:t> 2 · </a:t>
+            </a:r>
+            <a:r>
+              <a:rPr sz="1600" b="0" dirty="0" err="1">
                 <a:solidFill>
                   <a:srgbClr val="1B2230"/>
                 </a:solidFill>
                 <a:latin typeface="Arial"/>
               </a:rPr>
-              <a:t>Khóa hai bên cùng kiểu, cùng cách viết (slide sau).</a:t>
+              <a:t>Khóa</a:t>
+            </a:r>
+            <a:r>
+              <a:rPr sz="1600" b="0" dirty="0">
+                <a:solidFill>
+                  <a:srgbClr val="1B2230"/>
+                </a:solidFill>
+                <a:latin typeface="Arial"/>
+              </a:rPr>
+              <a:t> </a:t>
+            </a:r>
+            <a:r>
+              <a:rPr sz="1600" b="0" dirty="0" err="1">
+                <a:solidFill>
+                  <a:srgbClr val="1B2230"/>
+                </a:solidFill>
+                <a:latin typeface="Arial"/>
+              </a:rPr>
+              <a:t>hai</a:t>
+            </a:r>
+            <a:r>
+              <a:rPr sz="1600" b="0" dirty="0">
+                <a:solidFill>
+                  <a:srgbClr val="1B2230"/>
+                </a:solidFill>
+                <a:latin typeface="Arial"/>
+              </a:rPr>
+              <a:t> </a:t>
+            </a:r>
+            <a:r>
+              <a:rPr sz="1600" b="0" dirty="0" err="1">
+                <a:solidFill>
+                  <a:srgbClr val="1B2230"/>
+                </a:solidFill>
+                <a:latin typeface="Arial"/>
+              </a:rPr>
+              <a:t>bên</a:t>
+            </a:r>
+            <a:r>
+              <a:rPr sz="1600" b="0" dirty="0">
+                <a:solidFill>
+                  <a:srgbClr val="1B2230"/>
+                </a:solidFill>
+                <a:latin typeface="Arial"/>
+              </a:rPr>
+              <a:t> </a:t>
+            </a:r>
+            <a:r>
+              <a:rPr sz="1600" b="0" dirty="0" err="1">
+                <a:solidFill>
+                  <a:srgbClr val="1B2230"/>
+                </a:solidFill>
+                <a:latin typeface="Arial"/>
+              </a:rPr>
+              <a:t>cùng</a:t>
+            </a:r>
+            <a:r>
+              <a:rPr sz="1600" b="0" dirty="0">
+                <a:solidFill>
+                  <a:srgbClr val="1B2230"/>
+                </a:solidFill>
+                <a:latin typeface="Arial"/>
+              </a:rPr>
+              <a:t> </a:t>
+            </a:r>
+            <a:r>
+              <a:rPr sz="1600" b="0" dirty="0" err="1">
+                <a:solidFill>
+                  <a:srgbClr val="1B2230"/>
+                </a:solidFill>
+                <a:latin typeface="Arial"/>
+              </a:rPr>
+              <a:t>kiểu</a:t>
+            </a:r>
+            <a:r>
+              <a:rPr sz="1600" b="0" dirty="0">
+                <a:solidFill>
+                  <a:srgbClr val="1B2230"/>
+                </a:solidFill>
+                <a:latin typeface="Arial"/>
+              </a:rPr>
+              <a:t>, </a:t>
+            </a:r>
+            <a:r>
+              <a:rPr sz="1600" b="0" dirty="0" err="1">
+                <a:solidFill>
+                  <a:srgbClr val="1B2230"/>
+                </a:solidFill>
+                <a:latin typeface="Arial"/>
+              </a:rPr>
+              <a:t>cùng</a:t>
+            </a:r>
+            <a:r>
+              <a:rPr sz="1600" b="0" dirty="0">
+                <a:solidFill>
+                  <a:srgbClr val="1B2230"/>
+                </a:solidFill>
+                <a:latin typeface="Arial"/>
+              </a:rPr>
+              <a:t> </a:t>
+            </a:r>
+            <a:r>
+              <a:rPr sz="1600" b="0" dirty="0" err="1">
+                <a:solidFill>
+                  <a:srgbClr val="1B2230"/>
+                </a:solidFill>
+                <a:latin typeface="Arial"/>
+              </a:rPr>
+              <a:t>cách</a:t>
+            </a:r>
+            <a:r>
+              <a:rPr sz="1600" b="0" dirty="0">
+                <a:solidFill>
+                  <a:srgbClr val="1B2230"/>
+                </a:solidFill>
+                <a:latin typeface="Arial"/>
+              </a:rPr>
+              <a:t> </a:t>
+            </a:r>
+            <a:r>
+              <a:rPr sz="1600" b="0" dirty="0" err="1">
+                <a:solidFill>
+                  <a:srgbClr val="1B2230"/>
+                </a:solidFill>
+                <a:latin typeface="Arial"/>
+              </a:rPr>
+              <a:t>viết</a:t>
+            </a:r>
+            <a:r>
+              <a:rPr sz="1600" b="0" dirty="0">
+                <a:solidFill>
+                  <a:srgbClr val="1B2230"/>
+                </a:solidFill>
+                <a:latin typeface="Arial"/>
+              </a:rPr>
+              <a:t> (slide </a:t>
+            </a:r>
+            <a:r>
+              <a:rPr sz="1600" b="0" dirty="0" err="1">
+                <a:solidFill>
+                  <a:srgbClr val="1B2230"/>
+                </a:solidFill>
+                <a:latin typeface="Arial"/>
+              </a:rPr>
+              <a:t>sau</a:t>
+            </a:r>
+            <a:r>
+              <a:rPr sz="1600" b="0" dirty="0">
+                <a:solidFill>
+                  <a:srgbClr val="1B2230"/>
+                </a:solidFill>
+                <a:latin typeface="Arial"/>
+              </a:rPr>
+              <a:t>).</a:t>
             </a:r>
           </a:p>
           <a:p>
@@ -22461,22 +25411,184 @@
               </a:spcBef>
             </a:pPr>
             <a:r>
-              <a:rPr sz="1600" b="1">
+              <a:rPr sz="1600" b="1" dirty="0" err="1">
                 <a:solidFill>
                   <a:srgbClr val="203864"/>
                 </a:solidFill>
                 <a:latin typeface="Arial"/>
               </a:rPr>
-              <a:t>Luật 3 · </a:t>
-            </a:r>
-            <a:r>
-              <a:rPr sz="1600" b="0">
+              <a:t>Luật</a:t>
+            </a:r>
+            <a:r>
+              <a:rPr sz="1600" b="1" dirty="0">
+                <a:solidFill>
+                  <a:srgbClr val="203864"/>
+                </a:solidFill>
+                <a:latin typeface="Arial"/>
+              </a:rPr>
+              <a:t> 3 · </a:t>
+            </a:r>
+            <a:r>
+              <a:rPr sz="1600" b="0" dirty="0" err="1">
                 <a:solidFill>
                   <a:srgbClr val="1B2230"/>
                 </a:solidFill>
                 <a:latin typeface="Arial"/>
               </a:rPr>
-              <a:t>Không thấy thì phải thấy #N/A, đừng khớp gần đúng.</a:t>
+              <a:t>Không</a:t>
+            </a:r>
+            <a:r>
+              <a:rPr sz="1600" b="0" dirty="0">
+                <a:solidFill>
+                  <a:srgbClr val="1B2230"/>
+                </a:solidFill>
+                <a:latin typeface="Arial"/>
+              </a:rPr>
+              <a:t> </a:t>
+            </a:r>
+            <a:r>
+              <a:rPr sz="1600" b="0" dirty="0" err="1">
+                <a:solidFill>
+                  <a:srgbClr val="1B2230"/>
+                </a:solidFill>
+                <a:latin typeface="Arial"/>
+              </a:rPr>
+              <a:t>thấy</a:t>
+            </a:r>
+            <a:r>
+              <a:rPr sz="1600" b="0" dirty="0">
+                <a:solidFill>
+                  <a:srgbClr val="1B2230"/>
+                </a:solidFill>
+                <a:latin typeface="Arial"/>
+              </a:rPr>
+              <a:t> </a:t>
+            </a:r>
+            <a:r>
+              <a:rPr sz="1600" b="0" dirty="0" err="1">
+                <a:solidFill>
+                  <a:srgbClr val="1B2230"/>
+                </a:solidFill>
+                <a:latin typeface="Arial"/>
+              </a:rPr>
+              <a:t>thì</a:t>
+            </a:r>
+            <a:r>
+              <a:rPr sz="1600" b="0" dirty="0">
+                <a:solidFill>
+                  <a:srgbClr val="1B2230"/>
+                </a:solidFill>
+                <a:latin typeface="Arial"/>
+              </a:rPr>
+              <a:t> </a:t>
+            </a:r>
+            <a:r>
+              <a:rPr sz="1600" b="0" dirty="0" err="1">
+                <a:solidFill>
+                  <a:srgbClr val="1B2230"/>
+                </a:solidFill>
+                <a:latin typeface="Arial"/>
+              </a:rPr>
+              <a:t>phải</a:t>
+            </a:r>
+            <a:r>
+              <a:rPr sz="1600" b="0" dirty="0">
+                <a:solidFill>
+                  <a:srgbClr val="1B2230"/>
+                </a:solidFill>
+                <a:latin typeface="Arial"/>
+              </a:rPr>
+              <a:t> </a:t>
+            </a:r>
+            <a:r>
+              <a:rPr sz="1600" b="0" dirty="0" err="1">
+                <a:solidFill>
+                  <a:srgbClr val="1B2230"/>
+                </a:solidFill>
+                <a:latin typeface="Arial"/>
+              </a:rPr>
+              <a:t>thấy</a:t>
+            </a:r>
+            <a:r>
+              <a:rPr sz="1600" b="0" dirty="0">
+                <a:solidFill>
+                  <a:srgbClr val="1B2230"/>
+                </a:solidFill>
+                <a:latin typeface="Arial"/>
+              </a:rPr>
+              <a:t> #N/A, </a:t>
+            </a:r>
+            <a:r>
+              <a:rPr sz="1600" b="0" dirty="0" err="1">
+                <a:solidFill>
+                  <a:srgbClr val="1B2230"/>
+                </a:solidFill>
+                <a:latin typeface="Arial"/>
+              </a:rPr>
+              <a:t>đừng</a:t>
+            </a:r>
+            <a:r>
+              <a:rPr sz="1600" b="0" dirty="0">
+                <a:solidFill>
+                  <a:srgbClr val="1B2230"/>
+                </a:solidFill>
+                <a:latin typeface="Arial"/>
+              </a:rPr>
+              <a:t> </a:t>
+            </a:r>
+            <a:r>
+              <a:rPr sz="1600" b="0" dirty="0" err="1">
+                <a:solidFill>
+                  <a:srgbClr val="1B2230"/>
+                </a:solidFill>
+                <a:latin typeface="Arial"/>
+              </a:rPr>
+              <a:t>khớp</a:t>
+            </a:r>
+            <a:r>
+              <a:rPr sz="1600" b="0" dirty="0">
+                <a:solidFill>
+                  <a:srgbClr val="1B2230"/>
+                </a:solidFill>
+                <a:latin typeface="Arial"/>
+              </a:rPr>
+              <a:t> </a:t>
+            </a:r>
+            <a:r>
+              <a:rPr sz="1600" b="0" dirty="0" err="1">
+                <a:solidFill>
+                  <a:srgbClr val="1B2230"/>
+                </a:solidFill>
+                <a:latin typeface="Arial"/>
+              </a:rPr>
+              <a:t>gần</a:t>
+            </a:r>
+            <a:r>
+              <a:rPr sz="1600" b="0" dirty="0">
+                <a:solidFill>
+                  <a:srgbClr val="1B2230"/>
+                </a:solidFill>
+                <a:latin typeface="Arial"/>
+              </a:rPr>
+              <a:t> </a:t>
+            </a:r>
+            <a:r>
+              <a:rPr sz="1600" b="0" dirty="0" err="1">
+                <a:solidFill>
+                  <a:srgbClr val="1B2230"/>
+                </a:solidFill>
+                <a:latin typeface="Arial"/>
+              </a:rPr>
+              <a:t>đúng</a:t>
+            </a:r>
+            <a:r>
+              <a:rPr sz="1600" b="0" dirty="0">
+                <a:solidFill>
+                  <a:srgbClr val="1B2230"/>
+                </a:solidFill>
+                <a:latin typeface="Arial"/>
+              </a:rPr>
+              <a:t>.</a:t>
             </a:r>
           </a:p>
         </p:txBody>
@@ -22878,13 +25990,238 @@
           <a:lstStyle/>
           <a:p>
             <a:r>
-              <a:rPr sz="1600" b="1">
+              <a:rPr sz="1600" b="1" dirty="0" err="1">
                 <a:solidFill>
                   <a:srgbClr val="203864"/>
                 </a:solidFill>
                 <a:latin typeface="Arial"/>
               </a:rPr>
-              <a:t>Không lỗi ≠ không sai. Doanh thu vẫn đúng (giá bán lấy từ Sales); sai là GIÁ VỐN.</a:t>
+              <a:t>Không</a:t>
+            </a:r>
+            <a:r>
+              <a:rPr sz="1600" b="1" dirty="0">
+                <a:solidFill>
+                  <a:srgbClr val="203864"/>
+                </a:solidFill>
+                <a:latin typeface="Arial"/>
+              </a:rPr>
+              <a:t> </a:t>
+            </a:r>
+            <a:r>
+              <a:rPr sz="1600" b="1" dirty="0" err="1">
+                <a:solidFill>
+                  <a:srgbClr val="203864"/>
+                </a:solidFill>
+                <a:latin typeface="Arial"/>
+              </a:rPr>
+              <a:t>lỗi</a:t>
+            </a:r>
+            <a:r>
+              <a:rPr sz="1600" b="1" dirty="0">
+                <a:solidFill>
+                  <a:srgbClr val="203864"/>
+                </a:solidFill>
+                <a:latin typeface="Arial"/>
+              </a:rPr>
+              <a:t> ≠ </a:t>
+            </a:r>
+            <a:r>
+              <a:rPr sz="1600" b="1" dirty="0" err="1">
+                <a:solidFill>
+                  <a:srgbClr val="203864"/>
+                </a:solidFill>
+                <a:latin typeface="Arial"/>
+              </a:rPr>
+              <a:t>không</a:t>
+            </a:r>
+            <a:r>
+              <a:rPr sz="1600" b="1" dirty="0">
+                <a:solidFill>
+                  <a:srgbClr val="203864"/>
+                </a:solidFill>
+                <a:latin typeface="Arial"/>
+              </a:rPr>
+              <a:t> </a:t>
+            </a:r>
+            <a:r>
+              <a:rPr sz="1600" b="1" dirty="0" err="1">
+                <a:solidFill>
+                  <a:srgbClr val="203864"/>
+                </a:solidFill>
+                <a:latin typeface="Arial"/>
+              </a:rPr>
+              <a:t>sai</a:t>
+            </a:r>
+            <a:r>
+              <a:rPr sz="1600" b="1" dirty="0">
+                <a:solidFill>
+                  <a:srgbClr val="203864"/>
+                </a:solidFill>
+                <a:latin typeface="Arial"/>
+              </a:rPr>
+              <a:t>. Doanh </a:t>
+            </a:r>
+            <a:r>
+              <a:rPr sz="1600" b="1" dirty="0" err="1">
+                <a:solidFill>
+                  <a:srgbClr val="203864"/>
+                </a:solidFill>
+                <a:latin typeface="Arial"/>
+              </a:rPr>
+              <a:t>thu</a:t>
+            </a:r>
+            <a:r>
+              <a:rPr sz="1600" b="1" dirty="0">
+                <a:solidFill>
+                  <a:srgbClr val="203864"/>
+                </a:solidFill>
+                <a:latin typeface="Arial"/>
+              </a:rPr>
+              <a:t> </a:t>
+            </a:r>
+            <a:r>
+              <a:rPr sz="1600" b="1" dirty="0" err="1">
+                <a:solidFill>
+                  <a:srgbClr val="203864"/>
+                </a:solidFill>
+                <a:latin typeface="Arial"/>
+              </a:rPr>
+              <a:t>vẫn</a:t>
+            </a:r>
+            <a:r>
+              <a:rPr sz="1600" b="1" dirty="0">
+                <a:solidFill>
+                  <a:srgbClr val="203864"/>
+                </a:solidFill>
+                <a:latin typeface="Arial"/>
+              </a:rPr>
+              <a:t> </a:t>
+            </a:r>
+            <a:r>
+              <a:rPr sz="1600" b="1" dirty="0" err="1">
+                <a:solidFill>
+                  <a:srgbClr val="203864"/>
+                </a:solidFill>
+                <a:latin typeface="Arial"/>
+              </a:rPr>
+              <a:t>đúng</a:t>
+            </a:r>
+            <a:r>
+              <a:rPr sz="1600" b="1" dirty="0">
+                <a:solidFill>
+                  <a:srgbClr val="203864"/>
+                </a:solidFill>
+                <a:latin typeface="Arial"/>
+              </a:rPr>
+              <a:t> (</a:t>
+            </a:r>
+            <a:r>
+              <a:rPr sz="1600" b="1" dirty="0" err="1">
+                <a:solidFill>
+                  <a:srgbClr val="203864"/>
+                </a:solidFill>
+                <a:latin typeface="Arial"/>
+              </a:rPr>
+              <a:t>giá</a:t>
+            </a:r>
+            <a:r>
+              <a:rPr sz="1600" b="1" dirty="0">
+                <a:solidFill>
+                  <a:srgbClr val="203864"/>
+                </a:solidFill>
+                <a:latin typeface="Arial"/>
+              </a:rPr>
+              <a:t> </a:t>
+            </a:r>
+            <a:r>
+              <a:rPr sz="1600" b="1" dirty="0" err="1">
+                <a:solidFill>
+                  <a:srgbClr val="203864"/>
+                </a:solidFill>
+                <a:latin typeface="Arial"/>
+              </a:rPr>
+              <a:t>bán</a:t>
+            </a:r>
+            <a:r>
+              <a:rPr sz="1600" b="1" dirty="0">
+                <a:solidFill>
+                  <a:srgbClr val="203864"/>
+                </a:solidFill>
+                <a:latin typeface="Arial"/>
+              </a:rPr>
+              <a:t> </a:t>
+            </a:r>
+            <a:r>
+              <a:rPr sz="1600" b="1" dirty="0" err="1">
+                <a:solidFill>
+                  <a:srgbClr val="203864"/>
+                </a:solidFill>
+                <a:latin typeface="Arial"/>
+              </a:rPr>
+              <a:t>lấy</a:t>
+            </a:r>
+            <a:r>
+              <a:rPr sz="1600" b="1" dirty="0">
+                <a:solidFill>
+                  <a:srgbClr val="203864"/>
+                </a:solidFill>
+                <a:latin typeface="Arial"/>
+              </a:rPr>
+              <a:t> </a:t>
+            </a:r>
+            <a:r>
+              <a:rPr sz="1600" b="1" dirty="0" err="1">
+                <a:solidFill>
+                  <a:srgbClr val="203864"/>
+                </a:solidFill>
+                <a:latin typeface="Arial"/>
+              </a:rPr>
+              <a:t>từ</a:t>
+            </a:r>
+            <a:r>
+              <a:rPr sz="1600" b="1" dirty="0">
+                <a:solidFill>
+                  <a:srgbClr val="203864"/>
+                </a:solidFill>
+                <a:latin typeface="Arial"/>
+              </a:rPr>
+              <a:t> Sales); </a:t>
+            </a:r>
+            <a:r>
+              <a:rPr sz="1600" b="1" dirty="0" err="1">
+                <a:solidFill>
+                  <a:srgbClr val="203864"/>
+                </a:solidFill>
+                <a:latin typeface="Arial"/>
+              </a:rPr>
+              <a:t>sai</a:t>
+            </a:r>
+            <a:r>
+              <a:rPr sz="1600" b="1" dirty="0">
+                <a:solidFill>
+                  <a:srgbClr val="203864"/>
+                </a:solidFill>
+                <a:latin typeface="Arial"/>
+              </a:rPr>
+              <a:t> </a:t>
+            </a:r>
+            <a:r>
+              <a:rPr sz="1600" b="1" dirty="0" err="1">
+                <a:solidFill>
+                  <a:srgbClr val="203864"/>
+                </a:solidFill>
+                <a:latin typeface="Arial"/>
+              </a:rPr>
+              <a:t>là</a:t>
+            </a:r>
+            <a:r>
+              <a:rPr sz="1600" b="1" dirty="0">
+                <a:solidFill>
+                  <a:srgbClr val="203864"/>
+                </a:solidFill>
+                <a:latin typeface="Arial"/>
+              </a:rPr>
+              <a:t> GIÁ VỐN.</a:t>
             </a:r>
           </a:p>
         </p:txBody>
@@ -24911,7 +28248,7 @@
                     <a:lstStyle/>
                     <a:p>
                       <a:r>
-                        <a:rPr sz="1400" b="0">
+                        <a:rPr sz="1400" b="0" dirty="0">
                           <a:solidFill>
                             <a:srgbClr val="1B2230"/>
                           </a:solidFill>
@@ -24947,14 +28284,74 @@
                     <a:lstStyle/>
                     <a:p>
                       <a:r>
-                        <a:rPr sz="1400" b="1">
+                        <a:rPr sz="1400" b="1" dirty="0" err="1">
                           <a:solidFill>
                             <a:srgbClr val="203864"/>
                           </a:solidFill>
                           <a:latin typeface="Arial"/>
                         </a:rPr>
-                        <a:t>Tháng 1/2025: 23 → 17 ngày làm việc</a:t>
+                        <a:t>Tháng</a:t>
                       </a:r>
+                      <a:r>
+                        <a:rPr sz="1400" b="1" dirty="0">
+                          <a:solidFill>
+                            <a:srgbClr val="203864"/>
+                          </a:solidFill>
+                          <a:latin typeface="Arial"/>
+                        </a:rPr>
+                        <a:t> 1/2025: 23 → 17 </a:t>
+                      </a:r>
+                      <a:r>
+                        <a:rPr sz="1400" b="1" dirty="0" err="1">
+                          <a:solidFill>
+                            <a:srgbClr val="203864"/>
+                          </a:solidFill>
+                          <a:latin typeface="Arial"/>
+                        </a:rPr>
+                        <a:t>ngày</a:t>
+                      </a:r>
+                      <a:r>
+                        <a:rPr sz="1400" b="1" dirty="0">
+                          <a:solidFill>
+                            <a:srgbClr val="203864"/>
+                          </a:solidFill>
+                          <a:latin typeface="Arial"/>
+                        </a:rPr>
+                        <a:t> </a:t>
+                      </a:r>
+                      <a:r>
+                        <a:rPr sz="1400" b="1" dirty="0" err="1">
+                          <a:solidFill>
+                            <a:srgbClr val="203864"/>
+                          </a:solidFill>
+                          <a:latin typeface="Arial"/>
+                        </a:rPr>
+                        <a:t>làm</a:t>
+                      </a:r>
+                      <a:r>
+                        <a:rPr sz="1400" b="1" dirty="0">
+                          <a:solidFill>
+                            <a:srgbClr val="203864"/>
+                          </a:solidFill>
+                          <a:latin typeface="Arial"/>
+                        </a:rPr>
+                        <a:t> </a:t>
+                      </a:r>
+                      <a:r>
+                        <a:rPr sz="1400" b="1" dirty="0" err="1">
+                          <a:solidFill>
+                            <a:srgbClr val="203864"/>
+                          </a:solidFill>
+                          <a:latin typeface="Arial"/>
+                        </a:rPr>
+                        <a:t>việc</a:t>
+                      </a:r>
+                      <a:endParaRPr sz="1400" b="1" dirty="0">
+                        <a:solidFill>
+                          <a:srgbClr val="203864"/>
+                        </a:solidFill>
+                        <a:latin typeface="Arial"/>
+                      </a:endParaRPr>
                     </a:p>
                   </a:txBody>
                   <a:tcPr marL="73152" marR="73152" marT="27432" marB="27432" anchor="ctr">
@@ -25252,7 +28649,13 @@
           <p:cNvGraphicFramePr>
             <a:graphicFrameLocks noGrp="1"/>
           </p:cNvGraphicFramePr>
-          <p:nvPr/>
+          <p:nvPr>
+            <p:extLst>
+              <p:ext uri="{D42A27DB-BD31-4B8C-83A1-F6EECF244321}">
+                <p14:modId xmlns:p14="http://schemas.microsoft.com/office/powerpoint/2010/main" val="4057452561"/>
+              </p:ext>
+            </p:extLst>
+          </p:nvPr>
         </p:nvGraphicFramePr>
         <p:xfrm>
           <a:off x="1527048" y="1554480"/>
@@ -25368,13 +28771,121 @@
                     <a:lstStyle/>
                     <a:p>
                       <a:r>
-                        <a:rPr sz="1800" b="0">
+                        <a:rPr sz="1800" b="0" dirty="0">
                           <a:solidFill>
                             <a:srgbClr val="1B2230"/>
                           </a:solidFill>
                           <a:latin typeface="Arial"/>
                         </a:rPr>
-                        <a:t>“Sản phẩm này thuộc nhóm nào?”</a:t>
+                        <a:t>“</a:t>
+                      </a:r>
+                      <a:r>
+                        <a:rPr sz="1800" b="0" dirty="0" err="1">
+                          <a:solidFill>
+                            <a:srgbClr val="1B2230"/>
+                          </a:solidFill>
+                          <a:latin typeface="Arial"/>
+                        </a:rPr>
+                        <a:t>Sản</a:t>
+                      </a:r>
+                      <a:r>
+                        <a:rPr sz="1800" b="0" dirty="0">
+                          <a:solidFill>
+                            <a:srgbClr val="1B2230"/>
+                          </a:solidFill>
+                          <a:latin typeface="Arial"/>
+                        </a:rPr>
+                        <a:t> </a:t>
+                      </a:r>
+                      <a:r>
+                        <a:rPr sz="1800" b="0" dirty="0" err="1">
+                          <a:solidFill>
+                            <a:srgbClr val="1B2230"/>
+                          </a:solidFill>
+                          <a:latin typeface="Arial"/>
+                        </a:rPr>
+                        <a:t>phẩm</a:t>
+                      </a:r>
+                      <a:r>
+                        <a:rPr sz="1800" b="0" dirty="0">
+                          <a:solidFill>
+                            <a:srgbClr val="1B2230"/>
+                          </a:solidFill>
+                          <a:latin typeface="Arial"/>
+                        </a:rPr>
+                        <a:t> </a:t>
+                      </a:r>
+                      <a:r>
+                        <a:rPr sz="1800" b="0" dirty="0" err="1">
+                          <a:solidFill>
+                            <a:srgbClr val="1B2230"/>
+                          </a:solidFill>
+                          <a:latin typeface="Arial"/>
+                        </a:rPr>
+                        <a:t>này</a:t>
+                      </a:r>
+                      <a:r>
+                        <a:rPr sz="1800" b="0" dirty="0">
+                          <a:solidFill>
+                            <a:srgbClr val="1B2230"/>
+                          </a:solidFill>
+                          <a:latin typeface="Arial"/>
+                        </a:rPr>
+                        <a:t> </a:t>
+                      </a:r>
+                      <a:r>
+                        <a:rPr sz="1800" b="0" dirty="0" err="1">
+                          <a:solidFill>
+                            <a:srgbClr val="1B2230"/>
+                          </a:solidFill>
+                          <a:latin typeface="Arial"/>
+                        </a:rPr>
+                        <a:t>thuộc</a:t>
+                      </a:r>
+                      <a:r>
+                        <a:rPr sz="1800" b="0" dirty="0">
+                          <a:solidFill>
+                            <a:srgbClr val="1B2230"/>
+                          </a:solidFill>
+                          <a:latin typeface="Arial"/>
+                        </a:rPr>
+                        <a:t> </a:t>
+                      </a:r>
+                      <a:r>
+                        <a:rPr sz="1800" b="0" dirty="0" err="1">
+                          <a:solidFill>
+                            <a:srgbClr val="1B2230"/>
+                          </a:solidFill>
+                          <a:latin typeface="Arial"/>
+                        </a:rPr>
+                        <a:t>nhóm</a:t>
+                      </a:r>
+                      <a:r>
+                        <a:rPr sz="1800" b="0" dirty="0">
+                          <a:solidFill>
+                            <a:srgbClr val="1B2230"/>
+                          </a:solidFill>
+                          <a:latin typeface="Arial"/>
+                        </a:rPr>
+                        <a:t> </a:t>
+                      </a:r>
+                      <a:r>
+                        <a:rPr sz="1800" b="0" dirty="0" err="1">
+                          <a:solidFill>
+                            <a:srgbClr val="1B2230"/>
+                          </a:solidFill>
+                          <a:latin typeface="Arial"/>
+                        </a:rPr>
+                        <a:t>nào</a:t>
+                      </a:r>
+                      <a:r>
+                        <a:rPr sz="1800" b="0" dirty="0">
+                          <a:solidFill>
+                            <a:srgbClr val="1B2230"/>
+                          </a:solidFill>
+                          <a:latin typeface="Arial"/>
+                        </a:rPr>
+                        <a:t>?”</a:t>
                       </a:r>
                     </a:p>
                   </a:txBody>
@@ -25526,13 +29037,85 @@
                     <a:lstStyle/>
                     <a:p>
                       <a:r>
-                        <a:rPr sz="1800" b="0">
+                        <a:rPr sz="1800" b="0" dirty="0">
                           <a:solidFill>
                             <a:srgbClr val="1B2230"/>
                           </a:solidFill>
                           <a:latin typeface="Arial"/>
                         </a:rPr>
-                        <a:t>“Bao nhiêu, theo vùng / tháng?”</a:t>
+                        <a:t>“Bao </a:t>
+                      </a:r>
+                      <a:r>
+                        <a:rPr sz="1800" b="0" dirty="0" err="1">
+                          <a:solidFill>
+                            <a:srgbClr val="1B2230"/>
+                          </a:solidFill>
+                          <a:latin typeface="Arial"/>
+                        </a:rPr>
+                        <a:t>nhiêu</a:t>
+                      </a:r>
+                      <a:r>
+                        <a:rPr sz="1800" b="0" dirty="0">
+                          <a:solidFill>
+                            <a:srgbClr val="1B2230"/>
+                          </a:solidFill>
+                          <a:latin typeface="Arial"/>
+                        </a:rPr>
+                        <a:t>, </a:t>
+                      </a:r>
+                      <a:r>
+                        <a:rPr sz="1800" b="0" dirty="0" err="1">
+                          <a:solidFill>
+                            <a:srgbClr val="1B2230"/>
+                          </a:solidFill>
+                          <a:latin typeface="Arial"/>
+                        </a:rPr>
+                        <a:t>theo</a:t>
+                      </a:r>
+                      <a:r>
+                        <a:rPr sz="1800" b="0" dirty="0">
+                          <a:solidFill>
+                            <a:srgbClr val="1B2230"/>
+                          </a:solidFill>
+                          <a:latin typeface="Arial"/>
+                        </a:rPr>
+                        <a:t> </a:t>
+                      </a:r>
+                      <a:r>
+                        <a:rPr sz="1800" b="0" dirty="0" err="1">
+                          <a:solidFill>
+                            <a:srgbClr val="1B2230"/>
+                          </a:solidFill>
+                          <a:latin typeface="Arial"/>
+                        </a:rPr>
+                        <a:t>vùng</a:t>
+                      </a:r>
+                      <a:r>
+                        <a:rPr sz="1800" b="0" dirty="0">
+                          <a:solidFill>
+                            <a:srgbClr val="1B2230"/>
+                          </a:solidFill>
+                          <a:latin typeface="Arial"/>
+                        </a:rPr>
+                        <a:t> / </a:t>
+                      </a:r>
+                      <a:r>
+                        <a:rPr sz="1800" b="0" dirty="0" err="1">
+                          <a:solidFill>
+                            <a:srgbClr val="1B2230"/>
+                          </a:solidFill>
+                          <a:latin typeface="Arial"/>
+                        </a:rPr>
+                        <a:t>tháng</a:t>
+                      </a:r>
+                      <a:r>
+                        <a:rPr sz="1800" b="0" dirty="0">
+                          <a:solidFill>
+                            <a:srgbClr val="1B2230"/>
+                          </a:solidFill>
+                          <a:latin typeface="Arial"/>
+                        </a:rPr>
+                        <a:t>?”</a:t>
                       </a:r>
                     </a:p>
                   </a:txBody>
@@ -25720,7 +29303,7 @@
                     <a:lstStyle/>
                     <a:p>
                       <a:r>
-                        <a:rPr sz="1800" b="0">
+                        <a:rPr sz="1800" b="0" dirty="0">
                           <a:solidFill>
                             <a:srgbClr val="203864"/>
                           </a:solidFill>
@@ -25783,13 +29366,166 @@
           <a:lstStyle/>
           <a:p>
             <a:r>
-              <a:rPr sz="1800" b="1">
+              <a:rPr sz="1800" b="1" dirty="0" err="1">
                 <a:solidFill>
                   <a:srgbClr val="203864"/>
                 </a:solidFill>
                 <a:latin typeface="Arial"/>
               </a:rPr>
-              <a:t>Bắt đầu từ câu hỏi, rồi mới chọn hàm.</a:t>
+              <a:t>Bắt</a:t>
+            </a:r>
+            <a:r>
+              <a:rPr sz="1800" b="1" dirty="0">
+                <a:solidFill>
+                  <a:srgbClr val="203864"/>
+                </a:solidFill>
+                <a:latin typeface="Arial"/>
+              </a:rPr>
+              <a:t> </a:t>
+            </a:r>
+            <a:r>
+              <a:rPr sz="1800" b="1" dirty="0" err="1">
+                <a:solidFill>
+                  <a:srgbClr val="203864"/>
+                </a:solidFill>
+                <a:latin typeface="Arial"/>
+              </a:rPr>
+              <a:t>đầu</a:t>
+            </a:r>
+            <a:r>
+              <a:rPr sz="1800" b="1" dirty="0">
+                <a:solidFill>
+                  <a:srgbClr val="203864"/>
+                </a:solidFill>
+                <a:latin typeface="Arial"/>
+              </a:rPr>
+              <a:t> </a:t>
+            </a:r>
+            <a:r>
+              <a:rPr sz="1800" b="1" dirty="0" err="1">
+                <a:solidFill>
+                  <a:srgbClr val="203864"/>
+                </a:solidFill>
+                <a:latin typeface="Arial"/>
+              </a:rPr>
+              <a:t>từ</a:t>
+            </a:r>
+            <a:r>
+              <a:rPr sz="1800" b="1" dirty="0">
+                <a:solidFill>
+                  <a:srgbClr val="203864"/>
+                </a:solidFill>
+                <a:latin typeface="Arial"/>
+              </a:rPr>
+              <a:t> </a:t>
+            </a:r>
+            <a:r>
+              <a:rPr sz="1800" b="1" dirty="0" err="1">
+                <a:solidFill>
+                  <a:srgbClr val="203864"/>
+                </a:solidFill>
+                <a:latin typeface="Arial"/>
+              </a:rPr>
+              <a:t>câu</a:t>
+            </a:r>
+            <a:r>
+              <a:rPr sz="1800" b="1" dirty="0">
+                <a:solidFill>
+                  <a:srgbClr val="203864"/>
+                </a:solidFill>
+                <a:latin typeface="Arial"/>
+              </a:rPr>
+              <a:t> </a:t>
+            </a:r>
+            <a:r>
+              <a:rPr sz="1800" b="1" dirty="0" err="1">
+                <a:solidFill>
+                  <a:srgbClr val="203864"/>
+                </a:solidFill>
+                <a:latin typeface="Arial"/>
+              </a:rPr>
+              <a:t>hỏi</a:t>
+            </a:r>
+            <a:r>
+              <a:rPr sz="1800" b="1" dirty="0">
+                <a:solidFill>
+                  <a:srgbClr val="203864"/>
+                </a:solidFill>
+                <a:latin typeface="Arial"/>
+              </a:rPr>
+              <a:t>, </a:t>
+            </a:r>
+            <a:r>
+              <a:rPr sz="1800" b="1" dirty="0" err="1">
+                <a:solidFill>
+                  <a:srgbClr val="203864"/>
+                </a:solidFill>
+                <a:latin typeface="Arial"/>
+              </a:rPr>
+              <a:t>rồi</a:t>
+            </a:r>
+            <a:r>
+              <a:rPr sz="1800" b="1" dirty="0">
+                <a:solidFill>
+                  <a:srgbClr val="203864"/>
+                </a:solidFill>
+                <a:latin typeface="Arial"/>
+              </a:rPr>
+              <a:t> </a:t>
+            </a:r>
+            <a:r>
+              <a:rPr sz="1800" b="1" dirty="0" err="1">
+                <a:solidFill>
+                  <a:srgbClr val="203864"/>
+                </a:solidFill>
+                <a:latin typeface="Arial"/>
+              </a:rPr>
+              <a:t>mới</a:t>
+            </a:r>
+            <a:r>
+              <a:rPr sz="1800" b="1" dirty="0">
+                <a:solidFill>
+                  <a:srgbClr val="203864"/>
+                </a:solidFill>
+                <a:latin typeface="Arial"/>
+              </a:rPr>
+              <a:t> </a:t>
+            </a:r>
+            <a:r>
+              <a:rPr sz="1800" b="1" dirty="0" err="1">
+                <a:solidFill>
+                  <a:srgbClr val="203864"/>
+                </a:solidFill>
+                <a:latin typeface="Arial"/>
+              </a:rPr>
+              <a:t>chọn</a:t>
+            </a:r>
+            <a:r>
+              <a:rPr sz="1800" b="1" dirty="0">
+                <a:solidFill>
+                  <a:srgbClr val="203864"/>
+                </a:solidFill>
+                <a:latin typeface="Arial"/>
+              </a:rPr>
+              <a:t> </a:t>
+            </a:r>
+            <a:r>
+              <a:rPr sz="1800" b="1" dirty="0" err="1">
+                <a:solidFill>
+                  <a:srgbClr val="203864"/>
+                </a:solidFill>
+                <a:latin typeface="Arial"/>
+              </a:rPr>
+              <a:t>hàm</a:t>
+            </a:r>
+            <a:r>
+              <a:rPr sz="1800" b="1" dirty="0">
+                <a:solidFill>
+                  <a:srgbClr val="203864"/>
+                </a:solidFill>
+                <a:latin typeface="Arial"/>
+              </a:rPr>
+              <a:t>.</a:t>
             </a:r>
           </a:p>
         </p:txBody>
@@ -25939,7 +29675,7 @@
         <p:spPr>
           <a:xfrm>
             <a:off x="1527048" y="2011680"/>
-            <a:ext cx="6309360" cy="4114800"/>
+            <a:ext cx="6309360" cy="2923877"/>
           </a:xfrm>
           <a:prstGeom prst="rect">
             <a:avLst/>
@@ -25953,7 +29689,7 @@
           <a:lstStyle/>
           <a:p>
             <a:r>
-              <a:rPr sz="1500" b="1">
+              <a:rPr sz="1500" b="1" dirty="0">
                 <a:solidFill>
                   <a:srgbClr val="203864"/>
                 </a:solidFill>
@@ -25962,13 +29698,184 @@
               <a:t>1. </a:t>
             </a:r>
             <a:r>
-              <a:rPr sz="1500" b="0">
+              <a:rPr sz="1500" b="0" dirty="0" err="1">
                 <a:solidFill>
                   <a:srgbClr val="1B2230"/>
                 </a:solidFill>
                 <a:latin typeface="Arial"/>
               </a:rPr>
-              <a:t>Mở file khởi đầu, lưu thành B2_&lt;HoTen&gt;.xlsx. Chép sheet Product từ B2_Product_DuplicateKey.xlsx: chuột phải tab → Move or Copy → tick Create a copy.</a:t>
+              <a:t>Mở</a:t>
+            </a:r>
+            <a:r>
+              <a:rPr sz="1500" b="0" dirty="0">
+                <a:solidFill>
+                  <a:srgbClr val="1B2230"/>
+                </a:solidFill>
+                <a:latin typeface="Arial"/>
+              </a:rPr>
+              <a:t> file </a:t>
+            </a:r>
+            <a:r>
+              <a:rPr sz="1500" b="0" dirty="0" err="1">
+                <a:solidFill>
+                  <a:srgbClr val="1B2230"/>
+                </a:solidFill>
+                <a:latin typeface="Arial"/>
+              </a:rPr>
+              <a:t>khởi</a:t>
+            </a:r>
+            <a:r>
+              <a:rPr sz="1500" b="0" dirty="0">
+                <a:solidFill>
+                  <a:srgbClr val="1B2230"/>
+                </a:solidFill>
+                <a:latin typeface="Arial"/>
+              </a:rPr>
+              <a:t> </a:t>
+            </a:r>
+            <a:r>
+              <a:rPr sz="1500" b="0" dirty="0" err="1">
+                <a:solidFill>
+                  <a:srgbClr val="1B2230"/>
+                </a:solidFill>
+                <a:latin typeface="Arial"/>
+              </a:rPr>
+              <a:t>đầu</a:t>
+            </a:r>
+            <a:r>
+              <a:rPr sz="1500" b="0" dirty="0">
+                <a:solidFill>
+                  <a:srgbClr val="1B2230"/>
+                </a:solidFill>
+                <a:latin typeface="Arial"/>
+              </a:rPr>
+              <a:t>, </a:t>
+            </a:r>
+            <a:r>
+              <a:rPr sz="1500" b="0" dirty="0" err="1">
+                <a:solidFill>
+                  <a:srgbClr val="1B2230"/>
+                </a:solidFill>
+                <a:latin typeface="Arial"/>
+              </a:rPr>
+              <a:t>lưu</a:t>
+            </a:r>
+            <a:r>
+              <a:rPr sz="1500" b="0" dirty="0">
+                <a:solidFill>
+                  <a:srgbClr val="1B2230"/>
+                </a:solidFill>
+                <a:latin typeface="Arial"/>
+              </a:rPr>
+              <a:t> </a:t>
+            </a:r>
+            <a:r>
+              <a:rPr sz="1500" b="0" dirty="0" err="1">
+                <a:solidFill>
+                  <a:srgbClr val="1B2230"/>
+                </a:solidFill>
+                <a:latin typeface="Arial"/>
+              </a:rPr>
+              <a:t>thành</a:t>
+            </a:r>
+            <a:r>
+              <a:rPr sz="1500" b="0" dirty="0">
+                <a:solidFill>
+                  <a:srgbClr val="1B2230"/>
+                </a:solidFill>
+                <a:latin typeface="Arial"/>
+              </a:rPr>
+              <a:t> B2_&lt;HoTen&gt;.xlsx. </a:t>
+            </a:r>
+            <a:r>
+              <a:rPr sz="1500" b="0" dirty="0" err="1">
+                <a:solidFill>
+                  <a:srgbClr val="1B2230"/>
+                </a:solidFill>
+                <a:latin typeface="Arial"/>
+              </a:rPr>
+              <a:t>Chép</a:t>
+            </a:r>
+            <a:r>
+              <a:rPr sz="1500" b="0" dirty="0">
+                <a:solidFill>
+                  <a:srgbClr val="1B2230"/>
+                </a:solidFill>
+                <a:latin typeface="Arial"/>
+              </a:rPr>
+              <a:t> sheet </a:t>
+            </a:r>
+            <a:r>
+              <a:rPr sz="1500" b="1" dirty="0">
+                <a:solidFill>
+                  <a:srgbClr val="1B2230"/>
+                </a:solidFill>
+                <a:latin typeface="Arial"/>
+              </a:rPr>
+              <a:t>Product</a:t>
+            </a:r>
+            <a:r>
+              <a:rPr sz="1500" b="0" dirty="0">
+                <a:solidFill>
+                  <a:srgbClr val="1B2230"/>
+                </a:solidFill>
+                <a:latin typeface="Arial"/>
+              </a:rPr>
+              <a:t> </a:t>
+            </a:r>
+            <a:r>
+              <a:rPr sz="1500" b="0" dirty="0" err="1">
+                <a:solidFill>
+                  <a:srgbClr val="1B2230"/>
+                </a:solidFill>
+                <a:latin typeface="Arial"/>
+              </a:rPr>
+              <a:t>từ</a:t>
+            </a:r>
+            <a:r>
+              <a:rPr sz="1500" b="0" dirty="0">
+                <a:solidFill>
+                  <a:srgbClr val="1B2230"/>
+                </a:solidFill>
+                <a:latin typeface="Arial"/>
+              </a:rPr>
+              <a:t> B2_Product_DuplicateKey.xlsx: </a:t>
+            </a:r>
+            <a:r>
+              <a:rPr sz="1500" b="0" dirty="0" err="1">
+                <a:solidFill>
+                  <a:srgbClr val="1B2230"/>
+                </a:solidFill>
+                <a:latin typeface="Arial"/>
+              </a:rPr>
+              <a:t>chuột</a:t>
+            </a:r>
+            <a:r>
+              <a:rPr sz="1500" b="0" dirty="0">
+                <a:solidFill>
+                  <a:srgbClr val="1B2230"/>
+                </a:solidFill>
+                <a:latin typeface="Arial"/>
+              </a:rPr>
+              <a:t> </a:t>
+            </a:r>
+            <a:r>
+              <a:rPr sz="1500" b="0" dirty="0" err="1">
+                <a:solidFill>
+                  <a:srgbClr val="1B2230"/>
+                </a:solidFill>
+                <a:latin typeface="Arial"/>
+              </a:rPr>
+              <a:t>phải</a:t>
+            </a:r>
+            <a:r>
+              <a:rPr sz="1500" b="0" dirty="0">
+                <a:solidFill>
+                  <a:srgbClr val="1B2230"/>
+                </a:solidFill>
+                <a:latin typeface="Arial"/>
+              </a:rPr>
+              <a:t> tab → Move or Copy → tick Create a copy.</a:t>
             </a:r>
           </a:p>
           <a:p>
@@ -25978,7 +29885,7 @@
               </a:spcBef>
             </a:pPr>
             <a:r>
-              <a:rPr sz="1500" b="1">
+              <a:rPr sz="1500" b="1" dirty="0">
                 <a:solidFill>
                   <a:srgbClr val="203864"/>
                 </a:solidFill>
@@ -25987,13 +29894,184 @@
               <a:t>2. </a:t>
             </a:r>
             <a:r>
-              <a:rPr sz="1500" b="0">
+              <a:rPr sz="1500" b="0" dirty="0" err="1">
                 <a:solidFill>
                   <a:srgbClr val="1B2230"/>
                 </a:solidFill>
                 <a:latin typeface="Arial"/>
               </a:rPr>
-              <a:t>Kiểm tra khóa: =COUNTIF(tblProduct[Product_Code],[@Product_Code]) → xóa bản ghi P021 cũ (dòng 22).</a:t>
+              <a:t>Kiểm</a:t>
+            </a:r>
+            <a:r>
+              <a:rPr sz="1500" b="0" dirty="0">
+                <a:solidFill>
+                  <a:srgbClr val="1B2230"/>
+                </a:solidFill>
+                <a:latin typeface="Arial"/>
+              </a:rPr>
+              <a:t> </a:t>
+            </a:r>
+            <a:r>
+              <a:rPr sz="1500" b="0" dirty="0" err="1">
+                <a:solidFill>
+                  <a:srgbClr val="1B2230"/>
+                </a:solidFill>
+                <a:latin typeface="Arial"/>
+              </a:rPr>
+              <a:t>tra</a:t>
+            </a:r>
+            <a:r>
+              <a:rPr sz="1500" b="0" dirty="0">
+                <a:solidFill>
+                  <a:srgbClr val="1B2230"/>
+                </a:solidFill>
+                <a:latin typeface="Arial"/>
+              </a:rPr>
+              <a:t> </a:t>
+            </a:r>
+            <a:r>
+              <a:rPr sz="1500" b="0" dirty="0" err="1">
+                <a:solidFill>
+                  <a:srgbClr val="1B2230"/>
+                </a:solidFill>
+                <a:latin typeface="Arial"/>
+              </a:rPr>
+              <a:t>khóa</a:t>
+            </a:r>
+            <a:r>
+              <a:rPr sz="1500" b="0" dirty="0">
+                <a:solidFill>
+                  <a:srgbClr val="1B2230"/>
+                </a:solidFill>
+                <a:latin typeface="Arial"/>
+              </a:rPr>
+              <a:t>: =COUNTIF(</a:t>
+            </a:r>
+            <a:r>
+              <a:rPr sz="1500" b="0" dirty="0" err="1">
+                <a:solidFill>
+                  <a:srgbClr val="1B2230"/>
+                </a:solidFill>
+                <a:latin typeface="Arial"/>
+              </a:rPr>
+              <a:t>tblProduct</a:t>
+            </a:r>
+            <a:r>
+              <a:rPr sz="1500" b="0" dirty="0">
+                <a:solidFill>
+                  <a:srgbClr val="1B2230"/>
+                </a:solidFill>
+                <a:latin typeface="Arial"/>
+              </a:rPr>
+              <a:t>[</a:t>
+            </a:r>
+            <a:r>
+              <a:rPr sz="1500" b="0" dirty="0" err="1">
+                <a:solidFill>
+                  <a:srgbClr val="1B2230"/>
+                </a:solidFill>
+                <a:latin typeface="Arial"/>
+              </a:rPr>
+              <a:t>Product_Code</a:t>
+            </a:r>
+            <a:r>
+              <a:rPr sz="1500" b="0" dirty="0">
+                <a:solidFill>
+                  <a:srgbClr val="1B2230"/>
+                </a:solidFill>
+                <a:latin typeface="Arial"/>
+              </a:rPr>
+              <a:t>],[@Product_Code]) → </a:t>
+            </a:r>
+            <a:r>
+              <a:rPr sz="1500" b="0" dirty="0" err="1">
+                <a:solidFill>
+                  <a:srgbClr val="1B2230"/>
+                </a:solidFill>
+                <a:latin typeface="Arial"/>
+              </a:rPr>
+              <a:t>xóa</a:t>
+            </a:r>
+            <a:r>
+              <a:rPr sz="1500" b="0" dirty="0">
+                <a:solidFill>
+                  <a:srgbClr val="1B2230"/>
+                </a:solidFill>
+                <a:latin typeface="Arial"/>
+              </a:rPr>
+              <a:t> </a:t>
+            </a:r>
+            <a:r>
+              <a:rPr sz="1500" b="0" dirty="0" err="1">
+                <a:solidFill>
+                  <a:srgbClr val="1B2230"/>
+                </a:solidFill>
+                <a:latin typeface="Arial"/>
+              </a:rPr>
+              <a:t>bản</a:t>
+            </a:r>
+            <a:r>
+              <a:rPr sz="1500" b="0" dirty="0">
+                <a:solidFill>
+                  <a:srgbClr val="1B2230"/>
+                </a:solidFill>
+                <a:latin typeface="Arial"/>
+              </a:rPr>
+              <a:t> </a:t>
+            </a:r>
+            <a:r>
+              <a:rPr sz="1500" b="0" dirty="0" err="1">
+                <a:solidFill>
+                  <a:srgbClr val="1B2230"/>
+                </a:solidFill>
+                <a:latin typeface="Arial"/>
+              </a:rPr>
+              <a:t>ghi</a:t>
+            </a:r>
+            <a:r>
+              <a:rPr sz="1500" b="0" dirty="0">
+                <a:solidFill>
+                  <a:srgbClr val="1B2230"/>
+                </a:solidFill>
+                <a:latin typeface="Arial"/>
+              </a:rPr>
+              <a:t> P021 </a:t>
+            </a:r>
+            <a:r>
+              <a:rPr sz="1500" b="0" dirty="0" err="1">
+                <a:solidFill>
+                  <a:srgbClr val="1B2230"/>
+                </a:solidFill>
+                <a:latin typeface="Arial"/>
+              </a:rPr>
+              <a:t>cũ</a:t>
+            </a:r>
+            <a:r>
+              <a:rPr sz="1500" b="0" dirty="0">
+                <a:solidFill>
+                  <a:srgbClr val="1B2230"/>
+                </a:solidFill>
+                <a:latin typeface="Arial"/>
+              </a:rPr>
+              <a:t> (</a:t>
+            </a:r>
+            <a:r>
+              <a:rPr sz="1500" b="0" dirty="0" err="1">
+                <a:solidFill>
+                  <a:srgbClr val="1B2230"/>
+                </a:solidFill>
+                <a:latin typeface="Arial"/>
+              </a:rPr>
+              <a:t>dòng</a:t>
+            </a:r>
+            <a:r>
+              <a:rPr sz="1500" b="0" dirty="0">
+                <a:solidFill>
+                  <a:srgbClr val="1B2230"/>
+                </a:solidFill>
+                <a:latin typeface="Arial"/>
+              </a:rPr>
+              <a:t> 22).</a:t>
             </a:r>
           </a:p>
           <a:p>
@@ -26003,7 +30081,7 @@
               </a:spcBef>
             </a:pPr>
             <a:r>
-              <a:rPr sz="1500" b="1">
+              <a:rPr sz="1500" b="1" dirty="0">
                 <a:solidFill>
                   <a:srgbClr val="203864"/>
                 </a:solidFill>
@@ -26012,13 +30090,76 @@
               <a:t>3. </a:t>
             </a:r>
             <a:r>
-              <a:rPr sz="1500" b="0">
+              <a:rPr sz="1500" b="1" dirty="0" err="1">
                 <a:solidFill>
                   <a:srgbClr val="1B2230"/>
                 </a:solidFill>
                 <a:latin typeface="Arial"/>
               </a:rPr>
-              <a:t>tblSales thêm: Category, Unit_Cost (XLOOKUP) · COGS = [@Quantity]*[@Unit_Cost] · Gross_Margin = [@Revenue]-[@COGS].</a:t>
+              <a:t>tblSales</a:t>
+            </a:r>
+            <a:r>
+              <a:rPr sz="1500" b="0" dirty="0">
+                <a:solidFill>
+                  <a:srgbClr val="1B2230"/>
+                </a:solidFill>
+                <a:latin typeface="Arial"/>
+              </a:rPr>
+              <a:t> </a:t>
+            </a:r>
+            <a:r>
+              <a:rPr sz="1500" b="0" dirty="0" err="1">
+                <a:solidFill>
+                  <a:srgbClr val="1B2230"/>
+                </a:solidFill>
+                <a:latin typeface="Arial"/>
+              </a:rPr>
+              <a:t>thêm</a:t>
+            </a:r>
+            <a:r>
+              <a:rPr sz="1500" b="0" dirty="0">
+                <a:solidFill>
+                  <a:srgbClr val="1B2230"/>
+                </a:solidFill>
+                <a:latin typeface="Arial"/>
+              </a:rPr>
+              <a:t>: Category, </a:t>
+            </a:r>
+            <a:r>
+              <a:rPr sz="1500" b="0" dirty="0" err="1">
+                <a:solidFill>
+                  <a:srgbClr val="1B2230"/>
+                </a:solidFill>
+                <a:latin typeface="Arial"/>
+              </a:rPr>
+              <a:t>Unit_Cost</a:t>
+            </a:r>
+            <a:r>
+              <a:rPr sz="1500" b="0" dirty="0">
+                <a:solidFill>
+                  <a:srgbClr val="1B2230"/>
+                </a:solidFill>
+                <a:latin typeface="Arial"/>
+              </a:rPr>
+              <a:t> (XLOOKUP) · COGS = [@Quantity]*[@Unit_Cost] · </a:t>
+            </a:r>
+            <a:r>
+              <a:rPr sz="1500" b="0" dirty="0" err="1">
+                <a:solidFill>
+                  <a:srgbClr val="1B2230"/>
+                </a:solidFill>
+                <a:latin typeface="Arial"/>
+              </a:rPr>
+              <a:t>Gross_Margin</a:t>
+            </a:r>
+            <a:r>
+              <a:rPr sz="1500" b="0" dirty="0">
+                <a:solidFill>
+                  <a:srgbClr val="1B2230"/>
+                </a:solidFill>
+                <a:latin typeface="Arial"/>
+              </a:rPr>
+              <a:t> = [@Revenue]-[@COGS].</a:t>
             </a:r>
           </a:p>
           <a:p>
@@ -26028,7 +30169,7 @@
               </a:spcBef>
             </a:pPr>
             <a:r>
-              <a:rPr sz="1500" b="1">
+              <a:rPr sz="1500" b="1" dirty="0">
                 <a:solidFill>
                   <a:srgbClr val="203864"/>
                 </a:solidFill>
@@ -26037,13 +30178,103 @@
               <a:t>4. </a:t>
             </a:r>
             <a:r>
-              <a:rPr sz="1500" b="0">
+              <a:rPr sz="1500" b="0" dirty="0">
                 <a:solidFill>
                   <a:srgbClr val="1B2230"/>
                 </a:solidFill>
                 <a:latin typeface="Arial"/>
               </a:rPr>
-              <a:t>Thang = MONTH · Quy = "Q"&amp;ROUNDUP(MONTH(…)/3,0) · Thu = TEXT(…,"ddd") · Phan_khuc = IFS (≥100.000 Cao, ≥30.000 Trung, còn lại Thấp).</a:t>
+              <a:t>Thang = MONTH · Quy = "Q"&amp;ROUNDUP(MONTH(…)/3,0) · Thu = TEXT(…,"</a:t>
+            </a:r>
+            <a:r>
+              <a:rPr sz="1500" b="0" dirty="0" err="1">
+                <a:solidFill>
+                  <a:srgbClr val="1B2230"/>
+                </a:solidFill>
+                <a:latin typeface="Arial"/>
+              </a:rPr>
+              <a:t>ddd</a:t>
+            </a:r>
+            <a:r>
+              <a:rPr sz="1500" b="0" dirty="0">
+                <a:solidFill>
+                  <a:srgbClr val="1B2230"/>
+                </a:solidFill>
+                <a:latin typeface="Arial"/>
+              </a:rPr>
+              <a:t>") · </a:t>
+            </a:r>
+            <a:r>
+              <a:rPr sz="1500" b="0" dirty="0" err="1">
+                <a:solidFill>
+                  <a:srgbClr val="1B2230"/>
+                </a:solidFill>
+                <a:latin typeface="Arial"/>
+              </a:rPr>
+              <a:t>Phan_khuc</a:t>
+            </a:r>
+            <a:r>
+              <a:rPr sz="1500" b="0" dirty="0">
+                <a:solidFill>
+                  <a:srgbClr val="1B2230"/>
+                </a:solidFill>
+                <a:latin typeface="Arial"/>
+              </a:rPr>
+              <a:t> = IFS (≥100.000 Cao, ≥30.000 Trung, </a:t>
+            </a:r>
+            <a:r>
+              <a:rPr sz="1500" b="0" dirty="0" err="1">
+                <a:solidFill>
+                  <a:srgbClr val="1B2230"/>
+                </a:solidFill>
+                <a:latin typeface="Arial"/>
+              </a:rPr>
+              <a:t>còn</a:t>
+            </a:r>
+            <a:r>
+              <a:rPr sz="1500" b="0" dirty="0">
+                <a:solidFill>
+                  <a:srgbClr val="1B2230"/>
+                </a:solidFill>
+                <a:latin typeface="Arial"/>
+              </a:rPr>
+              <a:t> </a:t>
+            </a:r>
+            <a:r>
+              <a:rPr sz="1500" b="0" dirty="0" err="1">
+                <a:solidFill>
+                  <a:srgbClr val="1B2230"/>
+                </a:solidFill>
+                <a:latin typeface="Arial"/>
+              </a:rPr>
+              <a:t>lại</a:t>
+            </a:r>
+            <a:r>
+              <a:rPr sz="1500" b="0" dirty="0">
+                <a:solidFill>
+                  <a:srgbClr val="1B2230"/>
+                </a:solidFill>
+                <a:latin typeface="Arial"/>
+              </a:rPr>
+              <a:t> </a:t>
+            </a:r>
+            <a:r>
+              <a:rPr sz="1500" b="0" dirty="0" err="1">
+                <a:solidFill>
+                  <a:srgbClr val="1B2230"/>
+                </a:solidFill>
+                <a:latin typeface="Arial"/>
+              </a:rPr>
+              <a:t>Thấp</a:t>
+            </a:r>
+            <a:r>
+              <a:rPr sz="1500" b="0" dirty="0">
+                <a:solidFill>
+                  <a:srgbClr val="1B2230"/>
+                </a:solidFill>
+                <a:latin typeface="Arial"/>
+              </a:rPr>
+              <a:t>).</a:t>
             </a:r>
           </a:p>
         </p:txBody>
@@ -26248,13 +30479,49 @@
           <a:lstStyle/>
           <a:p>
             <a:r>
-              <a:rPr sz="1200" b="0">
+              <a:rPr sz="1200" b="0" dirty="0">
                 <a:solidFill>
                   <a:srgbClr val="6B6F76"/>
                 </a:solidFill>
                 <a:latin typeface="Arial"/>
               </a:rPr>
-              <a:t>File khởi đầu: ../B1_Nen_tang_Excel_Du_lieu/Practice/B1_MCI_Mart_Q1_2025_Answer.xlsx · Practice/B2_Product_DuplicateKey.xlsx</a:t>
+              <a:t>File </a:t>
+            </a:r>
+            <a:r>
+              <a:rPr sz="1200" b="0" dirty="0" err="1">
+                <a:solidFill>
+                  <a:srgbClr val="6B6F76"/>
+                </a:solidFill>
+                <a:latin typeface="Arial"/>
+              </a:rPr>
+              <a:t>khởi</a:t>
+            </a:r>
+            <a:r>
+              <a:rPr sz="1200" b="0" dirty="0">
+                <a:solidFill>
+                  <a:srgbClr val="6B6F76"/>
+                </a:solidFill>
+                <a:latin typeface="Arial"/>
+              </a:rPr>
+              <a:t> </a:t>
+            </a:r>
+            <a:r>
+              <a:rPr sz="1200" b="0" dirty="0" err="1">
+                <a:solidFill>
+                  <a:srgbClr val="6B6F76"/>
+                </a:solidFill>
+                <a:latin typeface="Arial"/>
+              </a:rPr>
+              <a:t>đầu</a:t>
+            </a:r>
+            <a:r>
+              <a:rPr sz="1200" b="0" dirty="0">
+                <a:solidFill>
+                  <a:srgbClr val="6B6F76"/>
+                </a:solidFill>
+                <a:latin typeface="Arial"/>
+              </a:rPr>
+              <a:t>: ../B1_Nen_tang_Excel_Du_lieu/Practice/B1_MCI_Mart_Q1_2025_Answer.xlsx · Practice/B2_Product_DuplicateKey.xlsx</a:t>
             </a:r>
           </a:p>
         </p:txBody>
@@ -38956,13 +43223,40 @@
           <a:lstStyle/>
           <a:p>
             <a:r>
-              <a:rPr sz="1600" b="1">
+              <a:rPr sz="1600" b="1" dirty="0" err="1">
                 <a:solidFill>
                   <a:srgbClr val="203864"/>
                 </a:solidFill>
                 <a:latin typeface="Arial"/>
               </a:rPr>
-              <a:t>Hôm nay viết 3 card</a:t>
+              <a:t>Hôm</a:t>
+            </a:r>
+            <a:r>
+              <a:rPr sz="1600" b="1" dirty="0">
+                <a:solidFill>
+                  <a:srgbClr val="203864"/>
+                </a:solidFill>
+                <a:latin typeface="Arial"/>
+              </a:rPr>
+              <a:t> nay </a:t>
+            </a:r>
+            <a:r>
+              <a:rPr sz="1600" b="1" dirty="0" err="1">
+                <a:solidFill>
+                  <a:srgbClr val="203864"/>
+                </a:solidFill>
+                <a:latin typeface="Arial"/>
+              </a:rPr>
+              <a:t>viết</a:t>
+            </a:r>
+            <a:r>
+              <a:rPr sz="1600" b="1" dirty="0">
+                <a:solidFill>
+                  <a:srgbClr val="203864"/>
+                </a:solidFill>
+                <a:latin typeface="Arial"/>
+              </a:rPr>
+              <a:t> 3 card</a:t>
             </a:r>
           </a:p>
           <a:p>
@@ -38972,13 +43266,49 @@
               </a:spcBef>
             </a:pPr>
             <a:r>
-              <a:rPr sz="1600" b="0">
+              <a:rPr sz="1600" b="0" dirty="0">
                 <a:solidFill>
                   <a:srgbClr val="1B2230"/>
                 </a:solidFill>
                 <a:latin typeface="Arial"/>
               </a:rPr>
-              <a:t>1 · Total Revenue (cùng lớp)</a:t>
+              <a:t>1 · Total Revenue (</a:t>
+            </a:r>
+            <a:r>
+              <a:rPr sz="1600" b="0" dirty="0" err="1">
+                <a:solidFill>
+                  <a:srgbClr val="1B2230"/>
+                </a:solidFill>
+                <a:latin typeface="Arial"/>
+              </a:rPr>
+              <a:t>cùng</a:t>
+            </a:r>
+            <a:r>
+              <a:rPr sz="1600" b="0" dirty="0">
+                <a:solidFill>
+                  <a:srgbClr val="1B2230"/>
+                </a:solidFill>
+                <a:latin typeface="Arial"/>
+              </a:rPr>
+              <a:t> </a:t>
+            </a:r>
+            <a:r>
+              <a:rPr sz="1600" b="0" dirty="0" err="1">
+                <a:solidFill>
+                  <a:srgbClr val="1B2230"/>
+                </a:solidFill>
+                <a:latin typeface="Arial"/>
+              </a:rPr>
+              <a:t>lớp</a:t>
+            </a:r>
+            <a:r>
+              <a:rPr sz="1600" b="0" dirty="0">
+                <a:solidFill>
+                  <a:srgbClr val="1B2230"/>
+                </a:solidFill>
+                <a:latin typeface="Arial"/>
+              </a:rPr>
+              <a:t>)</a:t>
             </a:r>
           </a:p>
           <a:p>
@@ -38988,13 +43318,49 @@
               </a:spcBef>
             </a:pPr>
             <a:r>
-              <a:rPr sz="1600" b="0">
+              <a:rPr sz="1600" b="0" dirty="0">
                 <a:solidFill>
                   <a:srgbClr val="1B2230"/>
                 </a:solidFill>
                 <a:latin typeface="Arial"/>
               </a:rPr>
-              <a:t>2 · Total Orders (thực hành)</a:t>
+              <a:t>2 · Total Orders (</a:t>
+            </a:r>
+            <a:r>
+              <a:rPr sz="1600" b="0" dirty="0" err="1">
+                <a:solidFill>
+                  <a:srgbClr val="1B2230"/>
+                </a:solidFill>
+                <a:latin typeface="Arial"/>
+              </a:rPr>
+              <a:t>thực</a:t>
+            </a:r>
+            <a:r>
+              <a:rPr sz="1600" b="0" dirty="0">
+                <a:solidFill>
+                  <a:srgbClr val="1B2230"/>
+                </a:solidFill>
+                <a:latin typeface="Arial"/>
+              </a:rPr>
+              <a:t> </a:t>
+            </a:r>
+            <a:r>
+              <a:rPr sz="1600" b="0" dirty="0" err="1">
+                <a:solidFill>
+                  <a:srgbClr val="1B2230"/>
+                </a:solidFill>
+                <a:latin typeface="Arial"/>
+              </a:rPr>
+              <a:t>hành</a:t>
+            </a:r>
+            <a:r>
+              <a:rPr sz="1600" b="0" dirty="0">
+                <a:solidFill>
+                  <a:srgbClr val="1B2230"/>
+                </a:solidFill>
+                <a:latin typeface="Arial"/>
+              </a:rPr>
+              <a:t>)</a:t>
             </a:r>
           </a:p>
           <a:p>
@@ -39004,13 +43370,49 @@
               </a:spcBef>
             </a:pPr>
             <a:r>
-              <a:rPr sz="1600" b="0">
+              <a:rPr sz="1600" b="0" dirty="0">
                 <a:solidFill>
                   <a:srgbClr val="1B2230"/>
                 </a:solidFill>
                 <a:latin typeface="Arial"/>
               </a:rPr>
-              <a:t>3 · Gross Margin % (thực hành)</a:t>
+              <a:t>3 · Gross Margin % (</a:t>
+            </a:r>
+            <a:r>
+              <a:rPr sz="1600" b="0" dirty="0" err="1">
+                <a:solidFill>
+                  <a:srgbClr val="1B2230"/>
+                </a:solidFill>
+                <a:latin typeface="Arial"/>
+              </a:rPr>
+              <a:t>thực</a:t>
+            </a:r>
+            <a:r>
+              <a:rPr sz="1600" b="0" dirty="0">
+                <a:solidFill>
+                  <a:srgbClr val="1B2230"/>
+                </a:solidFill>
+                <a:latin typeface="Arial"/>
+              </a:rPr>
+              <a:t> </a:t>
+            </a:r>
+            <a:r>
+              <a:rPr sz="1600" b="0" dirty="0" err="1">
+                <a:solidFill>
+                  <a:srgbClr val="1B2230"/>
+                </a:solidFill>
+                <a:latin typeface="Arial"/>
+              </a:rPr>
+              <a:t>hành</a:t>
+            </a:r>
+            <a:r>
+              <a:rPr sz="1600" b="0" dirty="0">
+                <a:solidFill>
+                  <a:srgbClr val="1B2230"/>
+                </a:solidFill>
+                <a:latin typeface="Arial"/>
+              </a:rPr>
+              <a:t>)</a:t>
             </a:r>
           </a:p>
         </p:txBody>
@@ -41442,13 +45844,319 @@
           <a:lstStyle/>
           <a:p>
             <a:r>
-              <a:rPr sz="1600" b="0">
+              <a:rPr sz="1600" b="0" dirty="0">
                 <a:solidFill>
                   <a:srgbClr val="1B2230"/>
                 </a:solidFill>
                 <a:latin typeface="Arial"/>
               </a:rPr>
-              <a:t>IFERROR CHE lỗi chứ không SỬA lỗi. Thay bằng chữ có nghĩa, đừng thay bằng 0: “0%” là con số sai trông như thật.</a:t>
+              <a:t>IFERROR CHE </a:t>
+            </a:r>
+            <a:r>
+              <a:rPr sz="1600" b="0" dirty="0" err="1">
+                <a:solidFill>
+                  <a:srgbClr val="1B2230"/>
+                </a:solidFill>
+                <a:latin typeface="Arial"/>
+              </a:rPr>
+              <a:t>lỗi</a:t>
+            </a:r>
+            <a:r>
+              <a:rPr sz="1600" b="0" dirty="0">
+                <a:solidFill>
+                  <a:srgbClr val="1B2230"/>
+                </a:solidFill>
+                <a:latin typeface="Arial"/>
+              </a:rPr>
+              <a:t> </a:t>
+            </a:r>
+            <a:r>
+              <a:rPr sz="1600" b="0" dirty="0" err="1">
+                <a:solidFill>
+                  <a:srgbClr val="1B2230"/>
+                </a:solidFill>
+                <a:latin typeface="Arial"/>
+              </a:rPr>
+              <a:t>chứ</a:t>
+            </a:r>
+            <a:r>
+              <a:rPr sz="1600" b="0" dirty="0">
+                <a:solidFill>
+                  <a:srgbClr val="1B2230"/>
+                </a:solidFill>
+                <a:latin typeface="Arial"/>
+              </a:rPr>
+              <a:t> </a:t>
+            </a:r>
+            <a:r>
+              <a:rPr sz="1600" b="0" dirty="0" err="1">
+                <a:solidFill>
+                  <a:srgbClr val="1B2230"/>
+                </a:solidFill>
+                <a:latin typeface="Arial"/>
+              </a:rPr>
+              <a:t>không</a:t>
+            </a:r>
+            <a:r>
+              <a:rPr sz="1600" b="0" dirty="0">
+                <a:solidFill>
+                  <a:srgbClr val="1B2230"/>
+                </a:solidFill>
+                <a:latin typeface="Arial"/>
+              </a:rPr>
+              <a:t> SỬA </a:t>
+            </a:r>
+            <a:r>
+              <a:rPr sz="1600" b="0" dirty="0" err="1">
+                <a:solidFill>
+                  <a:srgbClr val="1B2230"/>
+                </a:solidFill>
+                <a:latin typeface="Arial"/>
+              </a:rPr>
+              <a:t>lỗi</a:t>
+            </a:r>
+            <a:r>
+              <a:rPr sz="1600" b="0" dirty="0">
+                <a:solidFill>
+                  <a:srgbClr val="1B2230"/>
+                </a:solidFill>
+                <a:latin typeface="Arial"/>
+              </a:rPr>
+              <a:t>. Thay </a:t>
+            </a:r>
+            <a:r>
+              <a:rPr sz="1600" b="0" dirty="0" err="1">
+                <a:solidFill>
+                  <a:srgbClr val="1B2230"/>
+                </a:solidFill>
+                <a:latin typeface="Arial"/>
+              </a:rPr>
+              <a:t>bằng</a:t>
+            </a:r>
+            <a:r>
+              <a:rPr sz="1600" b="0" dirty="0">
+                <a:solidFill>
+                  <a:srgbClr val="1B2230"/>
+                </a:solidFill>
+                <a:latin typeface="Arial"/>
+              </a:rPr>
+              <a:t> </a:t>
+            </a:r>
+            <a:r>
+              <a:rPr sz="1600" b="0" dirty="0" err="1">
+                <a:solidFill>
+                  <a:srgbClr val="1B2230"/>
+                </a:solidFill>
+                <a:latin typeface="Arial"/>
+              </a:rPr>
+              <a:t>chữ</a:t>
+            </a:r>
+            <a:r>
+              <a:rPr sz="1600" b="0" dirty="0">
+                <a:solidFill>
+                  <a:srgbClr val="1B2230"/>
+                </a:solidFill>
+                <a:latin typeface="Arial"/>
+              </a:rPr>
+              <a:t> </a:t>
+            </a:r>
+            <a:r>
+              <a:rPr sz="1600" b="0" dirty="0" err="1">
+                <a:solidFill>
+                  <a:srgbClr val="1B2230"/>
+                </a:solidFill>
+                <a:latin typeface="Arial"/>
+              </a:rPr>
+              <a:t>có</a:t>
+            </a:r>
+            <a:r>
+              <a:rPr sz="1600" b="0" dirty="0">
+                <a:solidFill>
+                  <a:srgbClr val="1B2230"/>
+                </a:solidFill>
+                <a:latin typeface="Arial"/>
+              </a:rPr>
+              <a:t> </a:t>
+            </a:r>
+            <a:r>
+              <a:rPr sz="1600" b="0" dirty="0" err="1">
+                <a:solidFill>
+                  <a:srgbClr val="1B2230"/>
+                </a:solidFill>
+                <a:latin typeface="Arial"/>
+              </a:rPr>
+              <a:t>nghĩa</a:t>
+            </a:r>
+            <a:r>
+              <a:rPr sz="1600" b="0" dirty="0">
+                <a:solidFill>
+                  <a:srgbClr val="1B2230"/>
+                </a:solidFill>
+                <a:latin typeface="Arial"/>
+              </a:rPr>
+              <a:t>, </a:t>
+            </a:r>
+            <a:r>
+              <a:rPr sz="1600" b="0" dirty="0" err="1">
+                <a:solidFill>
+                  <a:srgbClr val="1B2230"/>
+                </a:solidFill>
+                <a:latin typeface="Arial"/>
+              </a:rPr>
+              <a:t>đừng</a:t>
+            </a:r>
+            <a:r>
+              <a:rPr sz="1600" b="0" dirty="0">
+                <a:solidFill>
+                  <a:srgbClr val="1B2230"/>
+                </a:solidFill>
+                <a:latin typeface="Arial"/>
+              </a:rPr>
+              <a:t> </a:t>
+            </a:r>
+            <a:r>
+              <a:rPr sz="1600" b="0" dirty="0" err="1">
+                <a:solidFill>
+                  <a:srgbClr val="1B2230"/>
+                </a:solidFill>
+                <a:latin typeface="Arial"/>
+              </a:rPr>
+              <a:t>thay</a:t>
+            </a:r>
+            <a:r>
+              <a:rPr sz="1600" b="0" dirty="0">
+                <a:solidFill>
+                  <a:srgbClr val="1B2230"/>
+                </a:solidFill>
+                <a:latin typeface="Arial"/>
+              </a:rPr>
+              <a:t> </a:t>
+            </a:r>
+            <a:r>
+              <a:rPr sz="1600" b="0" dirty="0" err="1">
+                <a:solidFill>
+                  <a:srgbClr val="1B2230"/>
+                </a:solidFill>
+                <a:latin typeface="Arial"/>
+              </a:rPr>
+              <a:t>bằng</a:t>
+            </a:r>
+            <a:r>
+              <a:rPr sz="1600" b="0" dirty="0">
+                <a:solidFill>
+                  <a:srgbClr val="1B2230"/>
+                </a:solidFill>
+                <a:latin typeface="Arial"/>
+              </a:rPr>
+              <a:t> 0: “0%” </a:t>
+            </a:r>
+            <a:r>
+              <a:rPr sz="1600" b="0" dirty="0" err="1">
+                <a:solidFill>
+                  <a:srgbClr val="1B2230"/>
+                </a:solidFill>
+                <a:latin typeface="Arial"/>
+              </a:rPr>
+              <a:t>là</a:t>
+            </a:r>
+            <a:r>
+              <a:rPr sz="1600" b="0" dirty="0">
+                <a:solidFill>
+                  <a:srgbClr val="1B2230"/>
+                </a:solidFill>
+                <a:latin typeface="Arial"/>
+              </a:rPr>
+              <a:t> con </a:t>
+            </a:r>
+            <a:r>
+              <a:rPr sz="1600" b="0" dirty="0" err="1">
+                <a:solidFill>
+                  <a:srgbClr val="1B2230"/>
+                </a:solidFill>
+                <a:latin typeface="Arial"/>
+              </a:rPr>
+              <a:t>số</a:t>
+            </a:r>
+            <a:r>
+              <a:rPr sz="1600" b="0" dirty="0">
+                <a:solidFill>
+                  <a:srgbClr val="1B2230"/>
+                </a:solidFill>
+                <a:latin typeface="Arial"/>
+              </a:rPr>
+              <a:t> </a:t>
+            </a:r>
+            <a:r>
+              <a:rPr sz="1600" b="0" dirty="0" err="1">
+                <a:solidFill>
+                  <a:srgbClr val="1B2230"/>
+                </a:solidFill>
+                <a:latin typeface="Arial"/>
+              </a:rPr>
+              <a:t>sai</a:t>
+            </a:r>
+            <a:r>
+              <a:rPr sz="1600" b="0" dirty="0">
+                <a:solidFill>
+                  <a:srgbClr val="1B2230"/>
+                </a:solidFill>
+                <a:latin typeface="Arial"/>
+              </a:rPr>
+              <a:t> </a:t>
+            </a:r>
+            <a:r>
+              <a:rPr sz="1600" b="0" dirty="0" err="1">
+                <a:solidFill>
+                  <a:srgbClr val="1B2230"/>
+                </a:solidFill>
+                <a:latin typeface="Arial"/>
+              </a:rPr>
+              <a:t>trông</a:t>
+            </a:r>
+            <a:r>
+              <a:rPr sz="1600" b="0" dirty="0">
+                <a:solidFill>
+                  <a:srgbClr val="1B2230"/>
+                </a:solidFill>
+                <a:latin typeface="Arial"/>
+              </a:rPr>
+              <a:t> </a:t>
+            </a:r>
+            <a:r>
+              <a:rPr sz="1600" b="0" dirty="0" err="1">
+                <a:solidFill>
+                  <a:srgbClr val="1B2230"/>
+                </a:solidFill>
+                <a:latin typeface="Arial"/>
+              </a:rPr>
+              <a:t>như</a:t>
+            </a:r>
+            <a:r>
+              <a:rPr sz="1600" b="0" dirty="0">
+                <a:solidFill>
+                  <a:srgbClr val="1B2230"/>
+                </a:solidFill>
+                <a:latin typeface="Arial"/>
+              </a:rPr>
+              <a:t> </a:t>
+            </a:r>
+            <a:r>
+              <a:rPr sz="1600" b="0" dirty="0" err="1">
+                <a:solidFill>
+                  <a:srgbClr val="1B2230"/>
+                </a:solidFill>
+                <a:latin typeface="Arial"/>
+              </a:rPr>
+              <a:t>thật</a:t>
+            </a:r>
+            <a:r>
+              <a:rPr sz="1600" b="0" dirty="0">
+                <a:solidFill>
+                  <a:srgbClr val="1B2230"/>
+                </a:solidFill>
+                <a:latin typeface="Arial"/>
+              </a:rPr>
+              <a:t>.</a:t>
             </a:r>
           </a:p>
         </p:txBody>
